--- a/Ch0_Tools_You_Need.pptx
+++ b/Ch0_Tools_You_Need.pptx
@@ -5,22 +5,22 @@
     <p:sldMasterId id="2147483648" r:id="rId1"/>
   </p:sldMasterIdLst>
   <p:sldIdLst>
-    <p:sldId id="256" r:id="rId7"/>
-    <p:sldId id="257" r:id="rId8"/>
-    <p:sldId id="258" r:id="rId9"/>
-    <p:sldId id="259" r:id="rId10"/>
-    <p:sldId id="260" r:id="rId11"/>
-    <p:sldId id="261" r:id="rId12"/>
-    <p:sldId id="262" r:id="rId13"/>
-    <p:sldId id="263" r:id="rId14"/>
-    <p:sldId id="264" r:id="rId15"/>
-    <p:sldId id="265" r:id="rId16"/>
-    <p:sldId id="266" r:id="rId17"/>
-    <p:sldId id="267" r:id="rId18"/>
-    <p:sldId id="268" r:id="rId19"/>
-    <p:sldId id="269" r:id="rId20"/>
+    <p:sldId id="256" r:id="rId2"/>
+    <p:sldId id="257" r:id="rId3"/>
+    <p:sldId id="258" r:id="rId4"/>
+    <p:sldId id="259" r:id="rId5"/>
+    <p:sldId id="260" r:id="rId6"/>
+    <p:sldId id="261" r:id="rId7"/>
+    <p:sldId id="262" r:id="rId8"/>
+    <p:sldId id="263" r:id="rId9"/>
+    <p:sldId id="264" r:id="rId10"/>
+    <p:sldId id="265" r:id="rId11"/>
+    <p:sldId id="266" r:id="rId12"/>
+    <p:sldId id="267" r:id="rId13"/>
+    <p:sldId id="268" r:id="rId14"/>
+    <p:sldId id="269" r:id="rId15"/>
   </p:sldIdLst>
-  <p:sldSz cx="12191695" cy="6858000" type="screen4x3"/>
+  <p:sldSz cx="12192000" cy="6858000"/>
   <p:notesSz cx="6858000" cy="9144000"/>
   <p:defaultTextStyle>
     <a:defPPr>
@@ -117,6 +117,22 @@
       </a:defRPr>
     </a:lvl9pPr>
   </p:defaultTextStyle>
+  <p:extLst>
+    <p:ext uri="{EFAFB233-063F-42B5-8137-9DF3F51BA10A}">
+      <p15:sldGuideLst xmlns:p15="http://schemas.microsoft.com/office/powerpoint/2012/main">
+        <p15:guide id="1" orient="horz" pos="2160">
+          <p15:clr>
+            <a:srgbClr val="A4A3A4"/>
+          </p15:clr>
+        </p15:guide>
+        <p15:guide id="2" pos="2880">
+          <p15:clr>
+            <a:srgbClr val="A4A3A4"/>
+          </p15:clr>
+        </p15:guide>
+      </p15:sldGuideLst>
+    </p:ext>
+  </p:extLst>
 </p:presentation>
 </file>
 
@@ -158,10 +174,9 @@
           <a:lstStyle/>
           <a:p>
             <a:r>
-              <a:rPr lang="en-US" smtClean="0"/>
+              <a:rPr lang="en-US"/>
               <a:t>Click to edit Master title style</a:t>
             </a:r>
-            <a:endParaRPr lang="en-US"/>
           </a:p>
         </p:txBody>
       </p:sp>
@@ -277,10 +292,9 @@
           </a:lstStyle>
           <a:p>
             <a:r>
-              <a:rPr lang="en-US" smtClean="0"/>
+              <a:rPr lang="en-US"/>
               <a:t>Click to edit Master subtitle style</a:t>
             </a:r>
-            <a:endParaRPr lang="en-US"/>
           </a:p>
         </p:txBody>
       </p:sp>
@@ -301,7 +315,7 @@
           <a:p>
             <a:fld id="{5BCAD085-E8A6-8845-BD4E-CB4CCA059FC4}" type="datetimeFigureOut">
               <a:rPr lang="en-US" smtClean="0"/>
-              <a:t>1/27/13</a:t>
+              <a:t>7/5/2026</a:t>
             </a:fld>
             <a:endParaRPr lang="en-US"/>
           </a:p>
@@ -395,10 +409,9 @@
           <a:lstStyle/>
           <a:p>
             <a:r>
-              <a:rPr lang="en-US" smtClean="0"/>
+              <a:rPr lang="en-US"/>
               <a:t>Click to edit Master title style</a:t>
             </a:r>
-            <a:endParaRPr lang="en-US"/>
           </a:p>
         </p:txBody>
       </p:sp>
@@ -419,38 +432,37 @@
           <a:p>
             <a:pPr lvl="0"/>
             <a:r>
-              <a:rPr lang="en-US" smtClean="0"/>
+              <a:rPr lang="en-US"/>
               <a:t>Click to edit Master text styles</a:t>
             </a:r>
           </a:p>
           <a:p>
             <a:pPr lvl="1"/>
             <a:r>
-              <a:rPr lang="en-US" smtClean="0"/>
+              <a:rPr lang="en-US"/>
               <a:t>Second level</a:t>
             </a:r>
           </a:p>
           <a:p>
             <a:pPr lvl="2"/>
             <a:r>
-              <a:rPr lang="en-US" smtClean="0"/>
+              <a:rPr lang="en-US"/>
               <a:t>Third level</a:t>
             </a:r>
           </a:p>
           <a:p>
             <a:pPr lvl="3"/>
             <a:r>
-              <a:rPr lang="en-US" smtClean="0"/>
+              <a:rPr lang="en-US"/>
               <a:t>Fourth level</a:t>
             </a:r>
           </a:p>
           <a:p>
             <a:pPr lvl="4"/>
             <a:r>
-              <a:rPr lang="en-US" smtClean="0"/>
+              <a:rPr lang="en-US"/>
               <a:t>Fifth level</a:t>
             </a:r>
-            <a:endParaRPr lang="en-US"/>
           </a:p>
         </p:txBody>
       </p:sp>
@@ -471,7 +483,7 @@
           <a:p>
             <a:fld id="{5BCAD085-E8A6-8845-BD4E-CB4CCA059FC4}" type="datetimeFigureOut">
               <a:rPr lang="en-US" smtClean="0"/>
-              <a:t>1/27/13</a:t>
+              <a:t>7/5/2026</a:t>
             </a:fld>
             <a:endParaRPr lang="en-US"/>
           </a:p>
@@ -570,10 +582,9 @@
           <a:lstStyle/>
           <a:p>
             <a:r>
-              <a:rPr lang="en-US" smtClean="0"/>
+              <a:rPr lang="en-US"/>
               <a:t>Click to edit Master title style</a:t>
             </a:r>
-            <a:endParaRPr lang="en-US"/>
           </a:p>
         </p:txBody>
       </p:sp>
@@ -599,38 +610,37 @@
           <a:p>
             <a:pPr lvl="0"/>
             <a:r>
-              <a:rPr lang="en-US" smtClean="0"/>
+              <a:rPr lang="en-US"/>
               <a:t>Click to edit Master text styles</a:t>
             </a:r>
           </a:p>
           <a:p>
             <a:pPr lvl="1"/>
             <a:r>
-              <a:rPr lang="en-US" smtClean="0"/>
+              <a:rPr lang="en-US"/>
               <a:t>Second level</a:t>
             </a:r>
           </a:p>
           <a:p>
             <a:pPr lvl="2"/>
             <a:r>
-              <a:rPr lang="en-US" smtClean="0"/>
+              <a:rPr lang="en-US"/>
               <a:t>Third level</a:t>
             </a:r>
           </a:p>
           <a:p>
             <a:pPr lvl="3"/>
             <a:r>
-              <a:rPr lang="en-US" smtClean="0"/>
+              <a:rPr lang="en-US"/>
               <a:t>Fourth level</a:t>
             </a:r>
           </a:p>
           <a:p>
             <a:pPr lvl="4"/>
             <a:r>
-              <a:rPr lang="en-US" smtClean="0"/>
+              <a:rPr lang="en-US"/>
               <a:t>Fifth level</a:t>
             </a:r>
-            <a:endParaRPr lang="en-US"/>
           </a:p>
         </p:txBody>
       </p:sp>
@@ -651,7 +661,7 @@
           <a:p>
             <a:fld id="{5BCAD085-E8A6-8845-BD4E-CB4CCA059FC4}" type="datetimeFigureOut">
               <a:rPr lang="en-US" smtClean="0"/>
-              <a:t>1/27/13</a:t>
+              <a:t>7/5/2026</a:t>
             </a:fld>
             <a:endParaRPr lang="en-US"/>
           </a:p>
@@ -745,10 +755,9 @@
           <a:lstStyle/>
           <a:p>
             <a:r>
-              <a:rPr lang="en-US" smtClean="0"/>
+              <a:rPr lang="en-US"/>
               <a:t>Click to edit Master title style</a:t>
             </a:r>
-            <a:endParaRPr lang="en-US"/>
           </a:p>
         </p:txBody>
       </p:sp>
@@ -769,38 +778,37 @@
           <a:p>
             <a:pPr lvl="0"/>
             <a:r>
-              <a:rPr lang="en-US" smtClean="0"/>
+              <a:rPr lang="en-US"/>
               <a:t>Click to edit Master text styles</a:t>
             </a:r>
           </a:p>
           <a:p>
             <a:pPr lvl="1"/>
             <a:r>
-              <a:rPr lang="en-US" smtClean="0"/>
+              <a:rPr lang="en-US"/>
               <a:t>Second level</a:t>
             </a:r>
           </a:p>
           <a:p>
             <a:pPr lvl="2"/>
             <a:r>
-              <a:rPr lang="en-US" smtClean="0"/>
+              <a:rPr lang="en-US"/>
               <a:t>Third level</a:t>
             </a:r>
           </a:p>
           <a:p>
             <a:pPr lvl="3"/>
             <a:r>
-              <a:rPr lang="en-US" smtClean="0"/>
+              <a:rPr lang="en-US"/>
               <a:t>Fourth level</a:t>
             </a:r>
           </a:p>
           <a:p>
             <a:pPr lvl="4"/>
             <a:r>
-              <a:rPr lang="en-US" smtClean="0"/>
+              <a:rPr lang="en-US"/>
               <a:t>Fifth level</a:t>
             </a:r>
-            <a:endParaRPr lang="en-US"/>
           </a:p>
         </p:txBody>
       </p:sp>
@@ -821,7 +829,7 @@
           <a:p>
             <a:fld id="{5BCAD085-E8A6-8845-BD4E-CB4CCA059FC4}" type="datetimeFigureOut">
               <a:rPr lang="en-US" smtClean="0"/>
-              <a:t>1/27/13</a:t>
+              <a:t>7/5/2026</a:t>
             </a:fld>
             <a:endParaRPr lang="en-US"/>
           </a:p>
@@ -924,10 +932,9 @@
           </a:lstStyle>
           <a:p>
             <a:r>
-              <a:rPr lang="en-US" smtClean="0"/>
+              <a:rPr lang="en-US"/>
               <a:t>Click to edit Master title style</a:t>
             </a:r>
-            <a:endParaRPr lang="en-US"/>
           </a:p>
         </p:txBody>
       </p:sp>
@@ -1044,7 +1051,7 @@
           <a:p>
             <a:pPr lvl="0"/>
             <a:r>
-              <a:rPr lang="en-US" smtClean="0"/>
+              <a:rPr lang="en-US"/>
               <a:t>Click to edit Master text styles</a:t>
             </a:r>
           </a:p>
@@ -1067,7 +1074,7 @@
           <a:p>
             <a:fld id="{5BCAD085-E8A6-8845-BD4E-CB4CCA059FC4}" type="datetimeFigureOut">
               <a:rPr lang="en-US" smtClean="0"/>
-              <a:t>1/27/13</a:t>
+              <a:t>7/5/2026</a:t>
             </a:fld>
             <a:endParaRPr lang="en-US"/>
           </a:p>
@@ -1161,10 +1168,9 @@
           <a:lstStyle/>
           <a:p>
             <a:r>
-              <a:rPr lang="en-US" smtClean="0"/>
+              <a:rPr lang="en-US"/>
               <a:t>Click to edit Master title style</a:t>
             </a:r>
-            <a:endParaRPr lang="en-US"/>
           </a:p>
         </p:txBody>
       </p:sp>
@@ -1218,38 +1224,37 @@
           <a:p>
             <a:pPr lvl="0"/>
             <a:r>
-              <a:rPr lang="en-US" smtClean="0"/>
+              <a:rPr lang="en-US"/>
               <a:t>Click to edit Master text styles</a:t>
             </a:r>
           </a:p>
           <a:p>
             <a:pPr lvl="1"/>
             <a:r>
-              <a:rPr lang="en-US" smtClean="0"/>
+              <a:rPr lang="en-US"/>
               <a:t>Second level</a:t>
             </a:r>
           </a:p>
           <a:p>
             <a:pPr lvl="2"/>
             <a:r>
-              <a:rPr lang="en-US" smtClean="0"/>
+              <a:rPr lang="en-US"/>
               <a:t>Third level</a:t>
             </a:r>
           </a:p>
           <a:p>
             <a:pPr lvl="3"/>
             <a:r>
-              <a:rPr lang="en-US" smtClean="0"/>
+              <a:rPr lang="en-US"/>
               <a:t>Fourth level</a:t>
             </a:r>
           </a:p>
           <a:p>
             <a:pPr lvl="4"/>
             <a:r>
-              <a:rPr lang="en-US" smtClean="0"/>
+              <a:rPr lang="en-US"/>
               <a:t>Fifth level</a:t>
             </a:r>
-            <a:endParaRPr lang="en-US"/>
           </a:p>
         </p:txBody>
       </p:sp>
@@ -1303,38 +1308,37 @@
           <a:p>
             <a:pPr lvl="0"/>
             <a:r>
-              <a:rPr lang="en-US" smtClean="0"/>
+              <a:rPr lang="en-US"/>
               <a:t>Click to edit Master text styles</a:t>
             </a:r>
           </a:p>
           <a:p>
             <a:pPr lvl="1"/>
             <a:r>
-              <a:rPr lang="en-US" smtClean="0"/>
+              <a:rPr lang="en-US"/>
               <a:t>Second level</a:t>
             </a:r>
           </a:p>
           <a:p>
             <a:pPr lvl="2"/>
             <a:r>
-              <a:rPr lang="en-US" smtClean="0"/>
+              <a:rPr lang="en-US"/>
               <a:t>Third level</a:t>
             </a:r>
           </a:p>
           <a:p>
             <a:pPr lvl="3"/>
             <a:r>
-              <a:rPr lang="en-US" smtClean="0"/>
+              <a:rPr lang="en-US"/>
               <a:t>Fourth level</a:t>
             </a:r>
           </a:p>
           <a:p>
             <a:pPr lvl="4"/>
             <a:r>
-              <a:rPr lang="en-US" smtClean="0"/>
+              <a:rPr lang="en-US"/>
               <a:t>Fifth level</a:t>
             </a:r>
-            <a:endParaRPr lang="en-US"/>
           </a:p>
         </p:txBody>
       </p:sp>
@@ -1355,7 +1359,7 @@
           <a:p>
             <a:fld id="{5BCAD085-E8A6-8845-BD4E-CB4CCA059FC4}" type="datetimeFigureOut">
               <a:rPr lang="en-US" smtClean="0"/>
-              <a:t>1/27/13</a:t>
+              <a:t>7/5/2026</a:t>
             </a:fld>
             <a:endParaRPr lang="en-US"/>
           </a:p>
@@ -1453,10 +1457,9 @@
           </a:lstStyle>
           <a:p>
             <a:r>
-              <a:rPr lang="en-US" smtClean="0"/>
+              <a:rPr lang="en-US"/>
               <a:t>Click to edit Master title style</a:t>
             </a:r>
-            <a:endParaRPr lang="en-US"/>
           </a:p>
         </p:txBody>
       </p:sp>
@@ -1519,7 +1522,7 @@
           <a:p>
             <a:pPr lvl="0"/>
             <a:r>
-              <a:rPr lang="en-US" smtClean="0"/>
+              <a:rPr lang="en-US"/>
               <a:t>Click to edit Master text styles</a:t>
             </a:r>
           </a:p>
@@ -1575,38 +1578,37 @@
           <a:p>
             <a:pPr lvl="0"/>
             <a:r>
-              <a:rPr lang="en-US" smtClean="0"/>
+              <a:rPr lang="en-US"/>
               <a:t>Click to edit Master text styles</a:t>
             </a:r>
           </a:p>
           <a:p>
             <a:pPr lvl="1"/>
             <a:r>
-              <a:rPr lang="en-US" smtClean="0"/>
+              <a:rPr lang="en-US"/>
               <a:t>Second level</a:t>
             </a:r>
           </a:p>
           <a:p>
             <a:pPr lvl="2"/>
             <a:r>
-              <a:rPr lang="en-US" smtClean="0"/>
+              <a:rPr lang="en-US"/>
               <a:t>Third level</a:t>
             </a:r>
           </a:p>
           <a:p>
             <a:pPr lvl="3"/>
             <a:r>
-              <a:rPr lang="en-US" smtClean="0"/>
+              <a:rPr lang="en-US"/>
               <a:t>Fourth level</a:t>
             </a:r>
           </a:p>
           <a:p>
             <a:pPr lvl="4"/>
             <a:r>
-              <a:rPr lang="en-US" smtClean="0"/>
+              <a:rPr lang="en-US"/>
               <a:t>Fifth level</a:t>
             </a:r>
-            <a:endParaRPr lang="en-US"/>
           </a:p>
         </p:txBody>
       </p:sp>
@@ -1669,7 +1671,7 @@
           <a:p>
             <a:pPr lvl="0"/>
             <a:r>
-              <a:rPr lang="en-US" smtClean="0"/>
+              <a:rPr lang="en-US"/>
               <a:t>Click to edit Master text styles</a:t>
             </a:r>
           </a:p>
@@ -1725,38 +1727,37 @@
           <a:p>
             <a:pPr lvl="0"/>
             <a:r>
-              <a:rPr lang="en-US" smtClean="0"/>
+              <a:rPr lang="en-US"/>
               <a:t>Click to edit Master text styles</a:t>
             </a:r>
           </a:p>
           <a:p>
             <a:pPr lvl="1"/>
             <a:r>
-              <a:rPr lang="en-US" smtClean="0"/>
+              <a:rPr lang="en-US"/>
               <a:t>Second level</a:t>
             </a:r>
           </a:p>
           <a:p>
             <a:pPr lvl="2"/>
             <a:r>
-              <a:rPr lang="en-US" smtClean="0"/>
+              <a:rPr lang="en-US"/>
               <a:t>Third level</a:t>
             </a:r>
           </a:p>
           <a:p>
             <a:pPr lvl="3"/>
             <a:r>
-              <a:rPr lang="en-US" smtClean="0"/>
+              <a:rPr lang="en-US"/>
               <a:t>Fourth level</a:t>
             </a:r>
           </a:p>
           <a:p>
             <a:pPr lvl="4"/>
             <a:r>
-              <a:rPr lang="en-US" smtClean="0"/>
+              <a:rPr lang="en-US"/>
               <a:t>Fifth level</a:t>
             </a:r>
-            <a:endParaRPr lang="en-US"/>
           </a:p>
         </p:txBody>
       </p:sp>
@@ -1777,7 +1778,7 @@
           <a:p>
             <a:fld id="{5BCAD085-E8A6-8845-BD4E-CB4CCA059FC4}" type="datetimeFigureOut">
               <a:rPr lang="en-US" smtClean="0"/>
-              <a:t>1/27/13</a:t>
+              <a:t>7/5/2026</a:t>
             </a:fld>
             <a:endParaRPr lang="en-US"/>
           </a:p>
@@ -1871,10 +1872,9 @@
           <a:lstStyle/>
           <a:p>
             <a:r>
-              <a:rPr lang="en-US" smtClean="0"/>
+              <a:rPr lang="en-US"/>
               <a:t>Click to edit Master title style</a:t>
             </a:r>
-            <a:endParaRPr lang="en-US"/>
           </a:p>
         </p:txBody>
       </p:sp>
@@ -1895,7 +1895,7 @@
           <a:p>
             <a:fld id="{5BCAD085-E8A6-8845-BD4E-CB4CCA059FC4}" type="datetimeFigureOut">
               <a:rPr lang="en-US" smtClean="0"/>
-              <a:t>1/27/13</a:t>
+              <a:t>7/5/2026</a:t>
             </a:fld>
             <a:endParaRPr lang="en-US"/>
           </a:p>
@@ -1990,7 +1990,7 @@
           <a:p>
             <a:fld id="{5BCAD085-E8A6-8845-BD4E-CB4CCA059FC4}" type="datetimeFigureOut">
               <a:rPr lang="en-US" smtClean="0"/>
-              <a:t>1/27/13</a:t>
+              <a:t>7/5/2026</a:t>
             </a:fld>
             <a:endParaRPr lang="en-US"/>
           </a:p>
@@ -2093,10 +2093,9 @@
           </a:lstStyle>
           <a:p>
             <a:r>
-              <a:rPr lang="en-US" smtClean="0"/>
+              <a:rPr lang="en-US"/>
               <a:t>Click to edit Master title style</a:t>
             </a:r>
-            <a:endParaRPr lang="en-US"/>
           </a:p>
         </p:txBody>
       </p:sp>
@@ -2150,38 +2149,37 @@
           <a:p>
             <a:pPr lvl="0"/>
             <a:r>
-              <a:rPr lang="en-US" smtClean="0"/>
+              <a:rPr lang="en-US"/>
               <a:t>Click to edit Master text styles</a:t>
             </a:r>
           </a:p>
           <a:p>
             <a:pPr lvl="1"/>
             <a:r>
-              <a:rPr lang="en-US" smtClean="0"/>
+              <a:rPr lang="en-US"/>
               <a:t>Second level</a:t>
             </a:r>
           </a:p>
           <a:p>
             <a:pPr lvl="2"/>
             <a:r>
-              <a:rPr lang="en-US" smtClean="0"/>
+              <a:rPr lang="en-US"/>
               <a:t>Third level</a:t>
             </a:r>
           </a:p>
           <a:p>
             <a:pPr lvl="3"/>
             <a:r>
-              <a:rPr lang="en-US" smtClean="0"/>
+              <a:rPr lang="en-US"/>
               <a:t>Fourth level</a:t>
             </a:r>
           </a:p>
           <a:p>
             <a:pPr lvl="4"/>
             <a:r>
-              <a:rPr lang="en-US" smtClean="0"/>
+              <a:rPr lang="en-US"/>
               <a:t>Fifth level</a:t>
             </a:r>
-            <a:endParaRPr lang="en-US"/>
           </a:p>
         </p:txBody>
       </p:sp>
@@ -2244,7 +2242,7 @@
           <a:p>
             <a:pPr lvl="0"/>
             <a:r>
-              <a:rPr lang="en-US" smtClean="0"/>
+              <a:rPr lang="en-US"/>
               <a:t>Click to edit Master text styles</a:t>
             </a:r>
           </a:p>
@@ -2267,7 +2265,7 @@
           <a:p>
             <a:fld id="{5BCAD085-E8A6-8845-BD4E-CB4CCA059FC4}" type="datetimeFigureOut">
               <a:rPr lang="en-US" smtClean="0"/>
-              <a:t>1/27/13</a:t>
+              <a:t>7/5/2026</a:t>
             </a:fld>
             <a:endParaRPr lang="en-US"/>
           </a:p>
@@ -2370,10 +2368,9 @@
           </a:lstStyle>
           <a:p>
             <a:r>
-              <a:rPr lang="en-US" smtClean="0"/>
+              <a:rPr lang="en-US"/>
               <a:t>Click to edit Master title style</a:t>
             </a:r>
-            <a:endParaRPr lang="en-US"/>
           </a:p>
         </p:txBody>
       </p:sp>
@@ -2497,7 +2494,7 @@
           <a:p>
             <a:pPr lvl="0"/>
             <a:r>
-              <a:rPr lang="en-US" smtClean="0"/>
+              <a:rPr lang="en-US"/>
               <a:t>Click to edit Master text styles</a:t>
             </a:r>
           </a:p>
@@ -2520,7 +2517,7 @@
           <a:p>
             <a:fld id="{5BCAD085-E8A6-8845-BD4E-CB4CCA059FC4}" type="datetimeFigureOut">
               <a:rPr lang="en-US" smtClean="0"/>
-              <a:t>1/27/13</a:t>
+              <a:t>7/5/2026</a:t>
             </a:fld>
             <a:endParaRPr lang="en-US"/>
           </a:p>
@@ -2629,10 +2626,9 @@
           <a:lstStyle/>
           <a:p>
             <a:r>
-              <a:rPr lang="en-US" smtClean="0"/>
+              <a:rPr lang="en-US"/>
               <a:t>Click to edit Master title style</a:t>
             </a:r>
-            <a:endParaRPr lang="en-US"/>
           </a:p>
         </p:txBody>
       </p:sp>
@@ -2663,38 +2659,37 @@
           <a:p>
             <a:pPr lvl="0"/>
             <a:r>
-              <a:rPr lang="en-US" smtClean="0"/>
+              <a:rPr lang="en-US"/>
               <a:t>Click to edit Master text styles</a:t>
             </a:r>
           </a:p>
           <a:p>
             <a:pPr lvl="1"/>
             <a:r>
-              <a:rPr lang="en-US" smtClean="0"/>
+              <a:rPr lang="en-US"/>
               <a:t>Second level</a:t>
             </a:r>
           </a:p>
           <a:p>
             <a:pPr lvl="2"/>
             <a:r>
-              <a:rPr lang="en-US" smtClean="0"/>
+              <a:rPr lang="en-US"/>
               <a:t>Third level</a:t>
             </a:r>
           </a:p>
           <a:p>
             <a:pPr lvl="3"/>
             <a:r>
-              <a:rPr lang="en-US" smtClean="0"/>
+              <a:rPr lang="en-US"/>
               <a:t>Fourth level</a:t>
             </a:r>
           </a:p>
           <a:p>
             <a:pPr lvl="4"/>
             <a:r>
-              <a:rPr lang="en-US" smtClean="0"/>
+              <a:rPr lang="en-US"/>
               <a:t>Fifth level</a:t>
             </a:r>
-            <a:endParaRPr lang="en-US"/>
           </a:p>
         </p:txBody>
       </p:sp>
@@ -2733,7 +2728,7 @@
           <a:p>
             <a:fld id="{5BCAD085-E8A6-8845-BD4E-CB4CCA059FC4}" type="datetimeFigureOut">
               <a:rPr lang="en-US" smtClean="0"/>
-              <a:t>1/27/13</a:t>
+              <a:t>7/5/2026</a:t>
             </a:fld>
             <a:endParaRPr lang="en-US"/>
           </a:p>
@@ -3092,7 +3087,7 @@
 </file>
 
 <file path=ppt/slides/slide1.xml><?xml version="1.0" encoding="utf-8"?>
-<p:sld xmlns:a="http://schemas.openxmlformats.org/drawingml/2006/main" xmlns:p="http://schemas.openxmlformats.org/presentationml/2006/main" xmlns:r="http://schemas.openxmlformats.org/officeDocument/2006/relationships">
+<p:sld xmlns:a="http://schemas.openxmlformats.org/drawingml/2006/main" xmlns:r="http://schemas.openxmlformats.org/officeDocument/2006/relationships" xmlns:p="http://schemas.openxmlformats.org/presentationml/2006/main">
   <p:cSld>
     <p:spTree>
       <p:nvGrpSpPr>
@@ -3100,7 +3095,14 @@
         <p:cNvGrpSpPr/>
         <p:nvPr/>
       </p:nvGrpSpPr>
-      <p:grpSpPr/>
+      <p:grpSpPr>
+        <a:xfrm>
+          <a:off x="0" y="0"/>
+          <a:ext cx="0" cy="0"/>
+          <a:chOff x="0" y="0"/>
+          <a:chExt cx="0" cy="0"/>
+        </a:xfrm>
+      </p:grpSpPr>
       <p:sp>
         <p:nvSpPr>
           <p:cNvPr id="2" name="Rectangle 1"/>
@@ -3142,6 +3144,7 @@
           <a:lstStyle/>
           <a:p>
             <a:pPr algn="ctr"/>
+            <a:endParaRPr/>
           </a:p>
         </p:txBody>
       </p:sp>
@@ -3186,6 +3189,7 @@
           <a:lstStyle/>
           <a:p>
             <a:pPr algn="ctr"/>
+            <a:endParaRPr/>
           </a:p>
         </p:txBody>
       </p:sp>
@@ -3206,7 +3210,7 @@
           <a:noFill/>
         </p:spPr>
         <p:txBody>
-          <a:bodyPr wrap="square" anchor="t" lIns="0" rIns="0" tIns="0" bIns="0">
+          <a:bodyPr wrap="square" lIns="0" tIns="0" rIns="0" bIns="0" anchor="t">
             <a:spAutoFit/>
           </a:bodyPr>
           <a:lstStyle/>
@@ -3240,7 +3244,7 @@
           <a:noFill/>
         </p:spPr>
         <p:txBody>
-          <a:bodyPr wrap="square" anchor="t" lIns="0" rIns="0" tIns="0" bIns="0">
+          <a:bodyPr wrap="square" lIns="0" tIns="0" rIns="0" bIns="0" anchor="t">
             <a:spAutoFit/>
           </a:bodyPr>
           <a:lstStyle/>
@@ -3282,7 +3286,7 @@
 </file>
 
 <file path=ppt/slides/slide10.xml><?xml version="1.0" encoding="utf-8"?>
-<p:sld xmlns:a="http://schemas.openxmlformats.org/drawingml/2006/main" xmlns:p="http://schemas.openxmlformats.org/presentationml/2006/main" xmlns:r="http://schemas.openxmlformats.org/officeDocument/2006/relationships">
+<p:sld xmlns:a="http://schemas.openxmlformats.org/drawingml/2006/main" xmlns:r="http://schemas.openxmlformats.org/officeDocument/2006/relationships" xmlns:p="http://schemas.openxmlformats.org/presentationml/2006/main">
   <p:cSld>
     <p:spTree>
       <p:nvGrpSpPr>
@@ -3290,7 +3294,14 @@
         <p:cNvGrpSpPr/>
         <p:nvPr/>
       </p:nvGrpSpPr>
-      <p:grpSpPr/>
+      <p:grpSpPr>
+        <a:xfrm>
+          <a:off x="0" y="0"/>
+          <a:ext cx="0" cy="0"/>
+          <a:chOff x="0" y="0"/>
+          <a:chExt cx="0" cy="0"/>
+        </a:xfrm>
+      </p:grpSpPr>
       <p:sp>
         <p:nvSpPr>
           <p:cNvPr id="2" name="Rectangle 1"/>
@@ -3332,6 +3343,7 @@
           <a:lstStyle/>
           <a:p>
             <a:pPr algn="ctr"/>
+            <a:endParaRPr/>
           </a:p>
         </p:txBody>
       </p:sp>
@@ -3376,6 +3388,7 @@
           <a:lstStyle/>
           <a:p>
             <a:pPr algn="ctr"/>
+            <a:endParaRPr/>
           </a:p>
         </p:txBody>
       </p:sp>
@@ -3396,7 +3409,7 @@
           <a:noFill/>
         </p:spPr>
         <p:txBody>
-          <a:bodyPr wrap="square" anchor="t" lIns="0" rIns="0" tIns="0" bIns="0">
+          <a:bodyPr wrap="square" lIns="0" tIns="0" rIns="0" bIns="0" anchor="t">
             <a:spAutoFit/>
           </a:bodyPr>
           <a:lstStyle/>
@@ -3454,6 +3467,7 @@
           <a:lstStyle/>
           <a:p>
             <a:pPr algn="ctr"/>
+            <a:endParaRPr/>
           </a:p>
         </p:txBody>
       </p:sp>
@@ -3474,7 +3488,7 @@
           <a:noFill/>
         </p:spPr>
         <p:txBody>
-          <a:bodyPr wrap="square" anchor="t" lIns="0" rIns="0" tIns="0" bIns="0">
+          <a:bodyPr wrap="square" lIns="0" tIns="0" rIns="0" bIns="0" anchor="t">
             <a:spAutoFit/>
           </a:bodyPr>
           <a:lstStyle/>
@@ -3508,7 +3522,7 @@
           <a:noFill/>
         </p:spPr>
         <p:txBody>
-          <a:bodyPr wrap="square" anchor="t" lIns="0" rIns="0" tIns="0" bIns="0">
+          <a:bodyPr wrap="square" lIns="0" tIns="0" rIns="0" bIns="0" anchor="t">
             <a:spAutoFit/>
           </a:bodyPr>
           <a:lstStyle/>
@@ -3543,7 +3557,7 @@
           <a:noFill/>
         </p:spPr>
         <p:txBody>
-          <a:bodyPr wrap="square" anchor="t" lIns="0" rIns="0" tIns="0" bIns="0">
+          <a:bodyPr wrap="square" lIns="0" tIns="0" rIns="0" bIns="0" anchor="t">
             <a:spAutoFit/>
           </a:bodyPr>
           <a:lstStyle/>
@@ -3642,7 +3656,7 @@
           </a:fontRef>
         </p:style>
         <p:txBody>
-          <a:bodyPr rtlCol="0" anchor="t" wrap="square" lIns="182880" tIns="109728"/>
+          <a:bodyPr wrap="square" lIns="182880" tIns="109728" rtlCol="0" anchor="t"/>
           <a:lstStyle/>
           <a:p>
             <a:pPr algn="ctr"/>
@@ -3675,7 +3689,7 @@
           <a:noFill/>
         </p:spPr>
         <p:txBody>
-          <a:bodyPr wrap="square" anchor="t" lIns="0" rIns="0" tIns="0" bIns="0">
+          <a:bodyPr wrap="square" lIns="0" tIns="0" rIns="0" bIns="0" anchor="t">
             <a:spAutoFit/>
           </a:bodyPr>
           <a:lstStyle/>
@@ -3774,7 +3788,7 @@
 </file>
 
 <file path=ppt/slides/slide11.xml><?xml version="1.0" encoding="utf-8"?>
-<p:sld xmlns:a="http://schemas.openxmlformats.org/drawingml/2006/main" xmlns:p="http://schemas.openxmlformats.org/presentationml/2006/main" xmlns:r="http://schemas.openxmlformats.org/officeDocument/2006/relationships">
+<p:sld xmlns:a="http://schemas.openxmlformats.org/drawingml/2006/main" xmlns:r="http://schemas.openxmlformats.org/officeDocument/2006/relationships" xmlns:p="http://schemas.openxmlformats.org/presentationml/2006/main">
   <p:cSld>
     <p:spTree>
       <p:nvGrpSpPr>
@@ -3782,7 +3796,14 @@
         <p:cNvGrpSpPr/>
         <p:nvPr/>
       </p:nvGrpSpPr>
-      <p:grpSpPr/>
+      <p:grpSpPr>
+        <a:xfrm>
+          <a:off x="0" y="0"/>
+          <a:ext cx="0" cy="0"/>
+          <a:chOff x="0" y="0"/>
+          <a:chExt cx="0" cy="0"/>
+        </a:xfrm>
+      </p:grpSpPr>
       <p:sp>
         <p:nvSpPr>
           <p:cNvPr id="2" name="Rectangle 1"/>
@@ -3824,6 +3845,7 @@
           <a:lstStyle/>
           <a:p>
             <a:pPr algn="ctr"/>
+            <a:endParaRPr/>
           </a:p>
         </p:txBody>
       </p:sp>
@@ -3868,6 +3890,7 @@
           <a:lstStyle/>
           <a:p>
             <a:pPr algn="ctr"/>
+            <a:endParaRPr/>
           </a:p>
         </p:txBody>
       </p:sp>
@@ -3888,7 +3911,7 @@
           <a:noFill/>
         </p:spPr>
         <p:txBody>
-          <a:bodyPr wrap="square" anchor="t" lIns="0" rIns="0" tIns="0" bIns="0">
+          <a:bodyPr wrap="square" lIns="0" tIns="0" rIns="0" bIns="0" anchor="t">
             <a:spAutoFit/>
           </a:bodyPr>
           <a:lstStyle/>
@@ -3946,6 +3969,7 @@
           <a:lstStyle/>
           <a:p>
             <a:pPr algn="ctr"/>
+            <a:endParaRPr/>
           </a:p>
         </p:txBody>
       </p:sp>
@@ -3966,7 +3990,7 @@
           <a:noFill/>
         </p:spPr>
         <p:txBody>
-          <a:bodyPr wrap="square" anchor="t" lIns="0" rIns="0" tIns="0" bIns="0">
+          <a:bodyPr wrap="square" lIns="0" tIns="0" rIns="0" bIns="0" anchor="t">
             <a:spAutoFit/>
           </a:bodyPr>
           <a:lstStyle/>
@@ -4000,7 +4024,7 @@
           <a:noFill/>
         </p:spPr>
         <p:txBody>
-          <a:bodyPr wrap="square" anchor="t" lIns="0" rIns="0" tIns="0" bIns="0">
+          <a:bodyPr wrap="square" lIns="0" tIns="0" rIns="0" bIns="0" anchor="t">
             <a:spAutoFit/>
           </a:bodyPr>
           <a:lstStyle/>
@@ -4037,8 +4061,20 @@
                 <a:tableStyleId>{5C22544A-7EE6-4342-B048-85BDC9FD1C3A}</a:tableStyleId>
               </a:tblPr>
               <a:tblGrid>
-                <a:gridCol w="3931920"/>
-                <a:gridCol w="7040880"/>
+                <a:gridCol w="3931920">
+                  <a:extLst>
+                    <a:ext uri="{9D8B030D-6E8A-4147-A177-3AD203B41FA5}">
+                      <a16:colId xmlns:a16="http://schemas.microsoft.com/office/drawing/2014/main" val="20000"/>
+                    </a:ext>
+                  </a:extLst>
+                </a:gridCol>
+                <a:gridCol w="7040880">
+                  <a:extLst>
+                    <a:ext uri="{9D8B030D-6E8A-4147-A177-3AD203B41FA5}">
+                      <a16:colId xmlns:a16="http://schemas.microsoft.com/office/drawing/2014/main" val="20001"/>
+                    </a:ext>
+                  </a:extLst>
+                </a:gridCol>
               </a:tblGrid>
               <a:tr h="467360">
                 <a:tc>
@@ -4085,6 +4121,11 @@
                     </a:solidFill>
                   </a:tcPr>
                 </a:tc>
+                <a:extLst>
+                  <a:ext uri="{0D108BD9-81ED-4DB2-BD59-A6C34878D82A}">
+                    <a16:rowId xmlns:a16="http://schemas.microsoft.com/office/drawing/2014/main" val="10000"/>
+                  </a:ext>
+                </a:extLst>
               </a:tr>
               <a:tr h="467360">
                 <a:tc>
@@ -4131,6 +4172,11 @@
                     </a:solidFill>
                   </a:tcPr>
                 </a:tc>
+                <a:extLst>
+                  <a:ext uri="{0D108BD9-81ED-4DB2-BD59-A6C34878D82A}">
+                    <a16:rowId xmlns:a16="http://schemas.microsoft.com/office/drawing/2014/main" val="10001"/>
+                  </a:ext>
+                </a:extLst>
               </a:tr>
               <a:tr h="467360">
                 <a:tc>
@@ -4177,6 +4223,11 @@
                     </a:solidFill>
                   </a:tcPr>
                 </a:tc>
+                <a:extLst>
+                  <a:ext uri="{0D108BD9-81ED-4DB2-BD59-A6C34878D82A}">
+                    <a16:rowId xmlns:a16="http://schemas.microsoft.com/office/drawing/2014/main" val="10002"/>
+                  </a:ext>
+                </a:extLst>
               </a:tr>
               <a:tr h="467360">
                 <a:tc>
@@ -4223,6 +4274,11 @@
                     </a:solidFill>
                   </a:tcPr>
                 </a:tc>
+                <a:extLst>
+                  <a:ext uri="{0D108BD9-81ED-4DB2-BD59-A6C34878D82A}">
+                    <a16:rowId xmlns:a16="http://schemas.microsoft.com/office/drawing/2014/main" val="10003"/>
+                  </a:ext>
+                </a:extLst>
               </a:tr>
               <a:tr h="467360">
                 <a:tc>
@@ -4269,6 +4325,11 @@
                     </a:solidFill>
                   </a:tcPr>
                 </a:tc>
+                <a:extLst>
+                  <a:ext uri="{0D108BD9-81ED-4DB2-BD59-A6C34878D82A}">
+                    <a16:rowId xmlns:a16="http://schemas.microsoft.com/office/drawing/2014/main" val="10004"/>
+                  </a:ext>
+                </a:extLst>
               </a:tr>
               <a:tr h="467360">
                 <a:tc>
@@ -4315,6 +4376,11 @@
                     </a:solidFill>
                   </a:tcPr>
                 </a:tc>
+                <a:extLst>
+                  <a:ext uri="{0D108BD9-81ED-4DB2-BD59-A6C34878D82A}">
+                    <a16:rowId xmlns:a16="http://schemas.microsoft.com/office/drawing/2014/main" val="10005"/>
+                  </a:ext>
+                </a:extLst>
               </a:tr>
               <a:tr h="467360">
                 <a:tc>
@@ -4361,6 +4427,11 @@
                     </a:solidFill>
                   </a:tcPr>
                 </a:tc>
+                <a:extLst>
+                  <a:ext uri="{0D108BD9-81ED-4DB2-BD59-A6C34878D82A}">
+                    <a16:rowId xmlns:a16="http://schemas.microsoft.com/office/drawing/2014/main" val="10006"/>
+                  </a:ext>
+                </a:extLst>
               </a:tr>
               <a:tr h="467360">
                 <a:tc>
@@ -4407,6 +4478,11 @@
                     </a:solidFill>
                   </a:tcPr>
                 </a:tc>
+                <a:extLst>
+                  <a:ext uri="{0D108BD9-81ED-4DB2-BD59-A6C34878D82A}">
+                    <a16:rowId xmlns:a16="http://schemas.microsoft.com/office/drawing/2014/main" val="10007"/>
+                  </a:ext>
+                </a:extLst>
               </a:tr>
               <a:tr h="467360">
                 <a:tc>
@@ -4453,6 +4529,11 @@
                     </a:solidFill>
                   </a:tcPr>
                 </a:tc>
+                <a:extLst>
+                  <a:ext uri="{0D108BD9-81ED-4DB2-BD59-A6C34878D82A}">
+                    <a16:rowId xmlns:a16="http://schemas.microsoft.com/office/drawing/2014/main" val="10008"/>
+                  </a:ext>
+                </a:extLst>
               </a:tr>
             </a:tbl>
           </a:graphicData>
@@ -4467,7 +4548,7 @@
 </file>
 
 <file path=ppt/slides/slide12.xml><?xml version="1.0" encoding="utf-8"?>
-<p:sld xmlns:a="http://schemas.openxmlformats.org/drawingml/2006/main" xmlns:p="http://schemas.openxmlformats.org/presentationml/2006/main" xmlns:r="http://schemas.openxmlformats.org/officeDocument/2006/relationships">
+<p:sld xmlns:a="http://schemas.openxmlformats.org/drawingml/2006/main" xmlns:r="http://schemas.openxmlformats.org/officeDocument/2006/relationships" xmlns:p="http://schemas.openxmlformats.org/presentationml/2006/main">
   <p:cSld>
     <p:spTree>
       <p:nvGrpSpPr>
@@ -4475,7 +4556,14 @@
         <p:cNvGrpSpPr/>
         <p:nvPr/>
       </p:nvGrpSpPr>
-      <p:grpSpPr/>
+      <p:grpSpPr>
+        <a:xfrm>
+          <a:off x="0" y="0"/>
+          <a:ext cx="0" cy="0"/>
+          <a:chOff x="0" y="0"/>
+          <a:chExt cx="0" cy="0"/>
+        </a:xfrm>
+      </p:grpSpPr>
       <p:sp>
         <p:nvSpPr>
           <p:cNvPr id="2" name="Rectangle 1"/>
@@ -4517,6 +4605,7 @@
           <a:lstStyle/>
           <a:p>
             <a:pPr algn="ctr"/>
+            <a:endParaRPr/>
           </a:p>
         </p:txBody>
       </p:sp>
@@ -4561,6 +4650,7 @@
           <a:lstStyle/>
           <a:p>
             <a:pPr algn="ctr"/>
+            <a:endParaRPr/>
           </a:p>
         </p:txBody>
       </p:sp>
@@ -4581,7 +4671,7 @@
           <a:noFill/>
         </p:spPr>
         <p:txBody>
-          <a:bodyPr wrap="square" anchor="t" lIns="0" rIns="0" tIns="0" bIns="0">
+          <a:bodyPr wrap="square" lIns="0" tIns="0" rIns="0" bIns="0" anchor="t">
             <a:spAutoFit/>
           </a:bodyPr>
           <a:lstStyle/>
@@ -4639,6 +4729,7 @@
           <a:lstStyle/>
           <a:p>
             <a:pPr algn="ctr"/>
+            <a:endParaRPr/>
           </a:p>
         </p:txBody>
       </p:sp>
@@ -4659,7 +4750,7 @@
           <a:noFill/>
         </p:spPr>
         <p:txBody>
-          <a:bodyPr wrap="square" anchor="t" lIns="0" rIns="0" tIns="0" bIns="0">
+          <a:bodyPr wrap="square" lIns="0" tIns="0" rIns="0" bIns="0" anchor="t">
             <a:spAutoFit/>
           </a:bodyPr>
           <a:lstStyle/>
@@ -4693,7 +4784,7 @@
           <a:noFill/>
         </p:spPr>
         <p:txBody>
-          <a:bodyPr wrap="square" anchor="t" lIns="0" rIns="0" tIns="0" bIns="0">
+          <a:bodyPr wrap="square" lIns="0" tIns="0" rIns="0" bIns="0" anchor="t">
             <a:spAutoFit/>
           </a:bodyPr>
           <a:lstStyle/>
@@ -4728,7 +4819,7 @@
           <a:noFill/>
         </p:spPr>
         <p:txBody>
-          <a:bodyPr wrap="square" anchor="t" lIns="0" rIns="0" tIns="0" bIns="0">
+          <a:bodyPr wrap="square" lIns="0" tIns="0" rIns="0" bIns="0" anchor="t">
             <a:spAutoFit/>
           </a:bodyPr>
           <a:lstStyle/>
@@ -4827,40 +4918,93 @@
           </a:fontRef>
         </p:style>
         <p:txBody>
-          <a:bodyPr rtlCol="0" anchor="t" wrap="square" lIns="182880" tIns="109728"/>
-          <a:lstStyle/>
-          <a:p>
-            <a:pPr algn="ctr"/>
-            <a:r>
-              <a:rPr sz="1400" b="0" i="0">
+          <a:bodyPr wrap="square" lIns="182880" tIns="109728" rtlCol="0" anchor="t"/>
+          <a:lstStyle/>
+          <a:p>
+            <a:r>
+              <a:rPr sz="1400" b="0" i="0" dirty="0">
                 <a:solidFill>
                   <a:srgbClr val="0F172A"/>
                 </a:solidFill>
                 <a:latin typeface="Consolas"/>
               </a:rPr>
-              <a:t>"update.mode": "none",</a:t>
-            </a:r>
-          </a:p>
-          <a:p>
-            <a:r>
-              <a:rPr sz="1400" b="0" i="0">
+              <a:t>"</a:t>
+            </a:r>
+            <a:r>
+              <a:rPr sz="1400" b="0" i="0" dirty="0" err="1">
                 <a:solidFill>
                   <a:srgbClr val="0F172A"/>
                 </a:solidFill>
                 <a:latin typeface="Consolas"/>
               </a:rPr>
-              <a:t>"extensions.autoUpdate": false,</a:t>
-            </a:r>
-          </a:p>
-          <a:p>
-            <a:r>
-              <a:rPr sz="1400" b="0" i="0">
+              <a:t>update.mode</a:t>
+            </a:r>
+            <a:r>
+              <a:rPr sz="1400" b="0" i="0" dirty="0">
                 <a:solidFill>
                   <a:srgbClr val="0F172A"/>
                 </a:solidFill>
                 <a:latin typeface="Consolas"/>
               </a:rPr>
-              <a:t>"extensions.autoCheckUpdates": false</a:t>
+              <a:t>": "none",</a:t>
+            </a:r>
+          </a:p>
+          <a:p>
+            <a:r>
+              <a:rPr sz="1400" b="0" i="0" dirty="0">
+                <a:solidFill>
+                  <a:srgbClr val="0F172A"/>
+                </a:solidFill>
+                <a:latin typeface="Consolas"/>
+              </a:rPr>
+              <a:t>"</a:t>
+            </a:r>
+            <a:r>
+              <a:rPr sz="1400" b="0" i="0" dirty="0" err="1">
+                <a:solidFill>
+                  <a:srgbClr val="0F172A"/>
+                </a:solidFill>
+                <a:latin typeface="Consolas"/>
+              </a:rPr>
+              <a:t>extensions.autoUpdate</a:t>
+            </a:r>
+            <a:r>
+              <a:rPr sz="1400" b="0" i="0" dirty="0">
+                <a:solidFill>
+                  <a:srgbClr val="0F172A"/>
+                </a:solidFill>
+                <a:latin typeface="Consolas"/>
+              </a:rPr>
+              <a:t>": false,</a:t>
+            </a:r>
+          </a:p>
+          <a:p>
+            <a:r>
+              <a:rPr sz="1400" b="0" i="0" dirty="0">
+                <a:solidFill>
+                  <a:srgbClr val="0F172A"/>
+                </a:solidFill>
+                <a:latin typeface="Consolas"/>
+              </a:rPr>
+              <a:t>"</a:t>
+            </a:r>
+            <a:r>
+              <a:rPr sz="1400" b="0" i="0" dirty="0" err="1">
+                <a:solidFill>
+                  <a:srgbClr val="0F172A"/>
+                </a:solidFill>
+                <a:latin typeface="Consolas"/>
+              </a:rPr>
+              <a:t>extensions.autoCheckUpdates</a:t>
+            </a:r>
+            <a:r>
+              <a:rPr sz="1400" b="0" i="0" dirty="0">
+                <a:solidFill>
+                  <a:srgbClr val="0F172A"/>
+                </a:solidFill>
+                <a:latin typeface="Consolas"/>
+              </a:rPr>
+              <a:t>": false</a:t>
             </a:r>
           </a:p>
         </p:txBody>
@@ -4882,7 +5026,7 @@
           <a:noFill/>
         </p:spPr>
         <p:txBody>
-          <a:bodyPr wrap="square" anchor="t" lIns="0" rIns="0" tIns="0" bIns="0">
+          <a:bodyPr wrap="square" lIns="0" tIns="0" rIns="0" bIns="0" anchor="t">
             <a:spAutoFit/>
           </a:bodyPr>
           <a:lstStyle/>
@@ -4953,7 +5097,7 @@
 </file>
 
 <file path=ppt/slides/slide13.xml><?xml version="1.0" encoding="utf-8"?>
-<p:sld xmlns:a="http://schemas.openxmlformats.org/drawingml/2006/main" xmlns:p="http://schemas.openxmlformats.org/presentationml/2006/main" xmlns:r="http://schemas.openxmlformats.org/officeDocument/2006/relationships">
+<p:sld xmlns:a="http://schemas.openxmlformats.org/drawingml/2006/main" xmlns:r="http://schemas.openxmlformats.org/officeDocument/2006/relationships" xmlns:p="http://schemas.openxmlformats.org/presentationml/2006/main">
   <p:cSld>
     <p:spTree>
       <p:nvGrpSpPr>
@@ -4961,7 +5105,14 @@
         <p:cNvGrpSpPr/>
         <p:nvPr/>
       </p:nvGrpSpPr>
-      <p:grpSpPr/>
+      <p:grpSpPr>
+        <a:xfrm>
+          <a:off x="0" y="0"/>
+          <a:ext cx="0" cy="0"/>
+          <a:chOff x="0" y="0"/>
+          <a:chExt cx="0" cy="0"/>
+        </a:xfrm>
+      </p:grpSpPr>
       <p:sp>
         <p:nvSpPr>
           <p:cNvPr id="2" name="Rectangle 1"/>
@@ -5003,6 +5154,7 @@
           <a:lstStyle/>
           <a:p>
             <a:pPr algn="ctr"/>
+            <a:endParaRPr/>
           </a:p>
         </p:txBody>
       </p:sp>
@@ -5047,6 +5199,7 @@
           <a:lstStyle/>
           <a:p>
             <a:pPr algn="ctr"/>
+            <a:endParaRPr/>
           </a:p>
         </p:txBody>
       </p:sp>
@@ -5067,7 +5220,7 @@
           <a:noFill/>
         </p:spPr>
         <p:txBody>
-          <a:bodyPr wrap="square" anchor="t" lIns="0" rIns="0" tIns="0" bIns="0">
+          <a:bodyPr wrap="square" lIns="0" tIns="0" rIns="0" bIns="0" anchor="t">
             <a:spAutoFit/>
           </a:bodyPr>
           <a:lstStyle/>
@@ -5125,6 +5278,7 @@
           <a:lstStyle/>
           <a:p>
             <a:pPr algn="ctr"/>
+            <a:endParaRPr/>
           </a:p>
         </p:txBody>
       </p:sp>
@@ -5145,7 +5299,7 @@
           <a:noFill/>
         </p:spPr>
         <p:txBody>
-          <a:bodyPr wrap="square" anchor="t" lIns="0" rIns="0" tIns="0" bIns="0">
+          <a:bodyPr wrap="square" lIns="0" tIns="0" rIns="0" bIns="0" anchor="t">
             <a:spAutoFit/>
           </a:bodyPr>
           <a:lstStyle/>
@@ -5179,7 +5333,7 @@
           <a:noFill/>
         </p:spPr>
         <p:txBody>
-          <a:bodyPr wrap="square" anchor="t" lIns="0" rIns="0" tIns="0" bIns="0">
+          <a:bodyPr wrap="square" lIns="0" tIns="0" rIns="0" bIns="0" anchor="t">
             <a:spAutoFit/>
           </a:bodyPr>
           <a:lstStyle/>
@@ -5214,7 +5368,7 @@
           <a:noFill/>
         </p:spPr>
         <p:txBody>
-          <a:bodyPr wrap="square" anchor="t" lIns="0" rIns="0" tIns="0" bIns="0">
+          <a:bodyPr wrap="square" lIns="0" tIns="0" rIns="0" bIns="0" anchor="t">
             <a:spAutoFit/>
           </a:bodyPr>
           <a:lstStyle/>
@@ -5369,7 +5523,7 @@
 </file>
 
 <file path=ppt/slides/slide14.xml><?xml version="1.0" encoding="utf-8"?>
-<p:sld xmlns:a="http://schemas.openxmlformats.org/drawingml/2006/main" xmlns:p="http://schemas.openxmlformats.org/presentationml/2006/main" xmlns:r="http://schemas.openxmlformats.org/officeDocument/2006/relationships">
+<p:sld xmlns:a="http://schemas.openxmlformats.org/drawingml/2006/main" xmlns:r="http://schemas.openxmlformats.org/officeDocument/2006/relationships" xmlns:p="http://schemas.openxmlformats.org/presentationml/2006/main">
   <p:cSld>
     <p:spTree>
       <p:nvGrpSpPr>
@@ -5377,7 +5531,14 @@
         <p:cNvGrpSpPr/>
         <p:nvPr/>
       </p:nvGrpSpPr>
-      <p:grpSpPr/>
+      <p:grpSpPr>
+        <a:xfrm>
+          <a:off x="0" y="0"/>
+          <a:ext cx="0" cy="0"/>
+          <a:chOff x="0" y="0"/>
+          <a:chExt cx="0" cy="0"/>
+        </a:xfrm>
+      </p:grpSpPr>
       <p:sp>
         <p:nvSpPr>
           <p:cNvPr id="2" name="Rectangle 1"/>
@@ -5419,6 +5580,7 @@
           <a:lstStyle/>
           <a:p>
             <a:pPr algn="ctr"/>
+            <a:endParaRPr/>
           </a:p>
         </p:txBody>
       </p:sp>
@@ -5463,6 +5625,7 @@
           <a:lstStyle/>
           <a:p>
             <a:pPr algn="ctr"/>
+            <a:endParaRPr/>
           </a:p>
         </p:txBody>
       </p:sp>
@@ -5483,7 +5646,7 @@
           <a:noFill/>
         </p:spPr>
         <p:txBody>
-          <a:bodyPr wrap="square" anchor="t" lIns="0" rIns="0" tIns="0" bIns="0">
+          <a:bodyPr wrap="square" lIns="0" tIns="0" rIns="0" bIns="0" anchor="t">
             <a:spAutoFit/>
           </a:bodyPr>
           <a:lstStyle/>
@@ -5541,6 +5704,7 @@
           <a:lstStyle/>
           <a:p>
             <a:pPr algn="ctr"/>
+            <a:endParaRPr/>
           </a:p>
         </p:txBody>
       </p:sp>
@@ -5561,7 +5725,7 @@
           <a:noFill/>
         </p:spPr>
         <p:txBody>
-          <a:bodyPr wrap="square" anchor="t" lIns="0" rIns="0" tIns="0" bIns="0">
+          <a:bodyPr wrap="square" lIns="0" tIns="0" rIns="0" bIns="0" anchor="t">
             <a:spAutoFit/>
           </a:bodyPr>
           <a:lstStyle/>
@@ -5595,7 +5759,7 @@
           <a:noFill/>
         </p:spPr>
         <p:txBody>
-          <a:bodyPr wrap="square" anchor="t" lIns="0" rIns="0" tIns="0" bIns="0">
+          <a:bodyPr wrap="square" lIns="0" tIns="0" rIns="0" bIns="0" anchor="t">
             <a:spAutoFit/>
           </a:bodyPr>
           <a:lstStyle/>
@@ -5630,7 +5794,7 @@
           <a:noFill/>
         </p:spPr>
         <p:txBody>
-          <a:bodyPr wrap="square" anchor="t" lIns="0" rIns="0" tIns="0" bIns="0">
+          <a:bodyPr wrap="square" lIns="0" tIns="0" rIns="0" bIns="0" anchor="t">
             <a:spAutoFit/>
           </a:bodyPr>
           <a:lstStyle/>
@@ -5811,7 +5975,7 @@
 </file>
 
 <file path=ppt/slides/slide2.xml><?xml version="1.0" encoding="utf-8"?>
-<p:sld xmlns:a="http://schemas.openxmlformats.org/drawingml/2006/main" xmlns:p="http://schemas.openxmlformats.org/presentationml/2006/main" xmlns:r="http://schemas.openxmlformats.org/officeDocument/2006/relationships">
+<p:sld xmlns:a="http://schemas.openxmlformats.org/drawingml/2006/main" xmlns:r="http://schemas.openxmlformats.org/officeDocument/2006/relationships" xmlns:p="http://schemas.openxmlformats.org/presentationml/2006/main">
   <p:cSld>
     <p:spTree>
       <p:nvGrpSpPr>
@@ -5819,7 +5983,14 @@
         <p:cNvGrpSpPr/>
         <p:nvPr/>
       </p:nvGrpSpPr>
-      <p:grpSpPr/>
+      <p:grpSpPr>
+        <a:xfrm>
+          <a:off x="0" y="0"/>
+          <a:ext cx="0" cy="0"/>
+          <a:chOff x="0" y="0"/>
+          <a:chExt cx="0" cy="0"/>
+        </a:xfrm>
+      </p:grpSpPr>
       <p:sp>
         <p:nvSpPr>
           <p:cNvPr id="2" name="Rectangle 1"/>
@@ -5861,6 +6032,7 @@
           <a:lstStyle/>
           <a:p>
             <a:pPr algn="ctr"/>
+            <a:endParaRPr/>
           </a:p>
         </p:txBody>
       </p:sp>
@@ -5905,6 +6077,7 @@
           <a:lstStyle/>
           <a:p>
             <a:pPr algn="ctr"/>
+            <a:endParaRPr/>
           </a:p>
         </p:txBody>
       </p:sp>
@@ -5925,7 +6098,7 @@
           <a:noFill/>
         </p:spPr>
         <p:txBody>
-          <a:bodyPr wrap="square" anchor="t" lIns="0" rIns="0" tIns="0" bIns="0">
+          <a:bodyPr wrap="square" lIns="0" tIns="0" rIns="0" bIns="0" anchor="t">
             <a:spAutoFit/>
           </a:bodyPr>
           <a:lstStyle/>
@@ -5983,6 +6156,7 @@
           <a:lstStyle/>
           <a:p>
             <a:pPr algn="ctr"/>
+            <a:endParaRPr/>
           </a:p>
         </p:txBody>
       </p:sp>
@@ -6003,7 +6177,7 @@
           <a:noFill/>
         </p:spPr>
         <p:txBody>
-          <a:bodyPr wrap="square" anchor="t" lIns="0" rIns="0" tIns="0" bIns="0">
+          <a:bodyPr wrap="square" lIns="0" tIns="0" rIns="0" bIns="0" anchor="t">
             <a:spAutoFit/>
           </a:bodyPr>
           <a:lstStyle/>
@@ -6037,7 +6211,7 @@
           <a:noFill/>
         </p:spPr>
         <p:txBody>
-          <a:bodyPr wrap="square" anchor="t" lIns="0" rIns="0" tIns="0" bIns="0">
+          <a:bodyPr wrap="square" lIns="0" tIns="0" rIns="0" bIns="0" anchor="t">
             <a:spAutoFit/>
           </a:bodyPr>
           <a:lstStyle/>
@@ -6072,7 +6246,7 @@
           <a:noFill/>
         </p:spPr>
         <p:txBody>
-          <a:bodyPr wrap="square" anchor="t" lIns="0" rIns="0" tIns="0" bIns="0">
+          <a:bodyPr wrap="square" lIns="0" tIns="0" rIns="0" bIns="0" anchor="t">
             <a:spAutoFit/>
           </a:bodyPr>
           <a:lstStyle/>
@@ -6293,7 +6467,7 @@
 </file>
 
 <file path=ppt/slides/slide3.xml><?xml version="1.0" encoding="utf-8"?>
-<p:sld xmlns:a="http://schemas.openxmlformats.org/drawingml/2006/main" xmlns:p="http://schemas.openxmlformats.org/presentationml/2006/main" xmlns:r="http://schemas.openxmlformats.org/officeDocument/2006/relationships">
+<p:sld xmlns:a="http://schemas.openxmlformats.org/drawingml/2006/main" xmlns:r="http://schemas.openxmlformats.org/officeDocument/2006/relationships" xmlns:p="http://schemas.openxmlformats.org/presentationml/2006/main">
   <p:cSld>
     <p:spTree>
       <p:nvGrpSpPr>
@@ -6301,7 +6475,14 @@
         <p:cNvGrpSpPr/>
         <p:nvPr/>
       </p:nvGrpSpPr>
-      <p:grpSpPr/>
+      <p:grpSpPr>
+        <a:xfrm>
+          <a:off x="0" y="0"/>
+          <a:ext cx="0" cy="0"/>
+          <a:chOff x="0" y="0"/>
+          <a:chExt cx="0" cy="0"/>
+        </a:xfrm>
+      </p:grpSpPr>
       <p:sp>
         <p:nvSpPr>
           <p:cNvPr id="2" name="Rectangle 1"/>
@@ -6343,6 +6524,7 @@
           <a:lstStyle/>
           <a:p>
             <a:pPr algn="ctr"/>
+            <a:endParaRPr/>
           </a:p>
         </p:txBody>
       </p:sp>
@@ -6387,6 +6569,7 @@
           <a:lstStyle/>
           <a:p>
             <a:pPr algn="ctr"/>
+            <a:endParaRPr/>
           </a:p>
         </p:txBody>
       </p:sp>
@@ -6407,7 +6590,7 @@
           <a:noFill/>
         </p:spPr>
         <p:txBody>
-          <a:bodyPr wrap="square" anchor="t" lIns="0" rIns="0" tIns="0" bIns="0">
+          <a:bodyPr wrap="square" lIns="0" tIns="0" rIns="0" bIns="0" anchor="t">
             <a:spAutoFit/>
           </a:bodyPr>
           <a:lstStyle/>
@@ -6465,6 +6648,7 @@
           <a:lstStyle/>
           <a:p>
             <a:pPr algn="ctr"/>
+            <a:endParaRPr/>
           </a:p>
         </p:txBody>
       </p:sp>
@@ -6485,7 +6669,7 @@
           <a:noFill/>
         </p:spPr>
         <p:txBody>
-          <a:bodyPr wrap="square" anchor="t" lIns="0" rIns="0" tIns="0" bIns="0">
+          <a:bodyPr wrap="square" lIns="0" tIns="0" rIns="0" bIns="0" anchor="t">
             <a:spAutoFit/>
           </a:bodyPr>
           <a:lstStyle/>
@@ -6519,7 +6703,7 @@
           <a:noFill/>
         </p:spPr>
         <p:txBody>
-          <a:bodyPr wrap="square" anchor="t" lIns="0" rIns="0" tIns="0" bIns="0">
+          <a:bodyPr wrap="square" lIns="0" tIns="0" rIns="0" bIns="0" anchor="t">
             <a:spAutoFit/>
           </a:bodyPr>
           <a:lstStyle/>
@@ -6554,7 +6738,7 @@
           <a:noFill/>
         </p:spPr>
         <p:txBody>
-          <a:bodyPr wrap="square" anchor="t" lIns="0" rIns="0" tIns="0" bIns="0">
+          <a:bodyPr wrap="square" lIns="0" tIns="0" rIns="0" bIns="0" anchor="t">
             <a:spAutoFit/>
           </a:bodyPr>
           <a:lstStyle/>
@@ -6737,7 +6921,7 @@
 </file>
 
 <file path=ppt/slides/slide4.xml><?xml version="1.0" encoding="utf-8"?>
-<p:sld xmlns:a="http://schemas.openxmlformats.org/drawingml/2006/main" xmlns:p="http://schemas.openxmlformats.org/presentationml/2006/main" xmlns:r="http://schemas.openxmlformats.org/officeDocument/2006/relationships">
+<p:sld xmlns:a="http://schemas.openxmlformats.org/drawingml/2006/main" xmlns:r="http://schemas.openxmlformats.org/officeDocument/2006/relationships" xmlns:p="http://schemas.openxmlformats.org/presentationml/2006/main">
   <p:cSld>
     <p:spTree>
       <p:nvGrpSpPr>
@@ -6745,7 +6929,14 @@
         <p:cNvGrpSpPr/>
         <p:nvPr/>
       </p:nvGrpSpPr>
-      <p:grpSpPr/>
+      <p:grpSpPr>
+        <a:xfrm>
+          <a:off x="0" y="0"/>
+          <a:ext cx="0" cy="0"/>
+          <a:chOff x="0" y="0"/>
+          <a:chExt cx="0" cy="0"/>
+        </a:xfrm>
+      </p:grpSpPr>
       <p:sp>
         <p:nvSpPr>
           <p:cNvPr id="2" name="Rectangle 1"/>
@@ -6787,6 +6978,7 @@
           <a:lstStyle/>
           <a:p>
             <a:pPr algn="ctr"/>
+            <a:endParaRPr/>
           </a:p>
         </p:txBody>
       </p:sp>
@@ -6831,6 +7023,7 @@
           <a:lstStyle/>
           <a:p>
             <a:pPr algn="ctr"/>
+            <a:endParaRPr/>
           </a:p>
         </p:txBody>
       </p:sp>
@@ -6851,7 +7044,7 @@
           <a:noFill/>
         </p:spPr>
         <p:txBody>
-          <a:bodyPr wrap="square" anchor="t" lIns="0" rIns="0" tIns="0" bIns="0">
+          <a:bodyPr wrap="square" lIns="0" tIns="0" rIns="0" bIns="0" anchor="t">
             <a:spAutoFit/>
           </a:bodyPr>
           <a:lstStyle/>
@@ -6909,6 +7102,7 @@
           <a:lstStyle/>
           <a:p>
             <a:pPr algn="ctr"/>
+            <a:endParaRPr/>
           </a:p>
         </p:txBody>
       </p:sp>
@@ -6929,7 +7123,7 @@
           <a:noFill/>
         </p:spPr>
         <p:txBody>
-          <a:bodyPr wrap="square" anchor="t" lIns="0" rIns="0" tIns="0" bIns="0">
+          <a:bodyPr wrap="square" lIns="0" tIns="0" rIns="0" bIns="0" anchor="t">
             <a:spAutoFit/>
           </a:bodyPr>
           <a:lstStyle/>
@@ -6963,7 +7157,7 @@
           <a:noFill/>
         </p:spPr>
         <p:txBody>
-          <a:bodyPr wrap="square" anchor="t" lIns="0" rIns="0" tIns="0" bIns="0">
+          <a:bodyPr wrap="square" lIns="0" tIns="0" rIns="0" bIns="0" anchor="t">
             <a:spAutoFit/>
           </a:bodyPr>
           <a:lstStyle/>
@@ -6998,7 +7192,7 @@
           <a:noFill/>
         </p:spPr>
         <p:txBody>
-          <a:bodyPr wrap="square" anchor="t" lIns="0" rIns="0" tIns="0" bIns="0">
+          <a:bodyPr wrap="square" lIns="0" tIns="0" rIns="0" bIns="0" anchor="t">
             <a:spAutoFit/>
           </a:bodyPr>
           <a:lstStyle/>
@@ -7181,7 +7375,7 @@
 </file>
 
 <file path=ppt/slides/slide5.xml><?xml version="1.0" encoding="utf-8"?>
-<p:sld xmlns:a="http://schemas.openxmlformats.org/drawingml/2006/main" xmlns:p="http://schemas.openxmlformats.org/presentationml/2006/main" xmlns:r="http://schemas.openxmlformats.org/officeDocument/2006/relationships">
+<p:sld xmlns:a="http://schemas.openxmlformats.org/drawingml/2006/main" xmlns:r="http://schemas.openxmlformats.org/officeDocument/2006/relationships" xmlns:p="http://schemas.openxmlformats.org/presentationml/2006/main">
   <p:cSld>
     <p:spTree>
       <p:nvGrpSpPr>
@@ -7189,7 +7383,14 @@
         <p:cNvGrpSpPr/>
         <p:nvPr/>
       </p:nvGrpSpPr>
-      <p:grpSpPr/>
+      <p:grpSpPr>
+        <a:xfrm>
+          <a:off x="0" y="0"/>
+          <a:ext cx="0" cy="0"/>
+          <a:chOff x="0" y="0"/>
+          <a:chExt cx="0" cy="0"/>
+        </a:xfrm>
+      </p:grpSpPr>
       <p:sp>
         <p:nvSpPr>
           <p:cNvPr id="2" name="Rectangle 1"/>
@@ -7231,6 +7432,7 @@
           <a:lstStyle/>
           <a:p>
             <a:pPr algn="ctr"/>
+            <a:endParaRPr/>
           </a:p>
         </p:txBody>
       </p:sp>
@@ -7275,6 +7477,7 @@
           <a:lstStyle/>
           <a:p>
             <a:pPr algn="ctr"/>
+            <a:endParaRPr/>
           </a:p>
         </p:txBody>
       </p:sp>
@@ -7295,7 +7498,7 @@
           <a:noFill/>
         </p:spPr>
         <p:txBody>
-          <a:bodyPr wrap="square" anchor="t" lIns="0" rIns="0" tIns="0" bIns="0">
+          <a:bodyPr wrap="square" lIns="0" tIns="0" rIns="0" bIns="0" anchor="t">
             <a:spAutoFit/>
           </a:bodyPr>
           <a:lstStyle/>
@@ -7353,6 +7556,7 @@
           <a:lstStyle/>
           <a:p>
             <a:pPr algn="ctr"/>
+            <a:endParaRPr/>
           </a:p>
         </p:txBody>
       </p:sp>
@@ -7373,7 +7577,7 @@
           <a:noFill/>
         </p:spPr>
         <p:txBody>
-          <a:bodyPr wrap="square" anchor="t" lIns="0" rIns="0" tIns="0" bIns="0">
+          <a:bodyPr wrap="square" lIns="0" tIns="0" rIns="0" bIns="0" anchor="t">
             <a:spAutoFit/>
           </a:bodyPr>
           <a:lstStyle/>
@@ -7407,7 +7611,7 @@
           <a:noFill/>
         </p:spPr>
         <p:txBody>
-          <a:bodyPr wrap="square" anchor="t" lIns="0" rIns="0" tIns="0" bIns="0">
+          <a:bodyPr wrap="square" lIns="0" tIns="0" rIns="0" bIns="0" anchor="t">
             <a:spAutoFit/>
           </a:bodyPr>
           <a:lstStyle/>
@@ -7442,7 +7646,7 @@
           <a:noFill/>
         </p:spPr>
         <p:txBody>
-          <a:bodyPr wrap="square" anchor="t" lIns="0" rIns="0" tIns="0" bIns="0">
+          <a:bodyPr wrap="square" lIns="0" tIns="0" rIns="0" bIns="0" anchor="t">
             <a:spAutoFit/>
           </a:bodyPr>
           <a:lstStyle/>
@@ -7569,7 +7773,7 @@
 </file>
 
 <file path=ppt/slides/slide6.xml><?xml version="1.0" encoding="utf-8"?>
-<p:sld xmlns:a="http://schemas.openxmlformats.org/drawingml/2006/main" xmlns:p="http://schemas.openxmlformats.org/presentationml/2006/main" xmlns:r="http://schemas.openxmlformats.org/officeDocument/2006/relationships">
+<p:sld xmlns:a="http://schemas.openxmlformats.org/drawingml/2006/main" xmlns:r="http://schemas.openxmlformats.org/officeDocument/2006/relationships" xmlns:p="http://schemas.openxmlformats.org/presentationml/2006/main">
   <p:cSld>
     <p:spTree>
       <p:nvGrpSpPr>
@@ -7577,7 +7781,14 @@
         <p:cNvGrpSpPr/>
         <p:nvPr/>
       </p:nvGrpSpPr>
-      <p:grpSpPr/>
+      <p:grpSpPr>
+        <a:xfrm>
+          <a:off x="0" y="0"/>
+          <a:ext cx="0" cy="0"/>
+          <a:chOff x="0" y="0"/>
+          <a:chExt cx="0" cy="0"/>
+        </a:xfrm>
+      </p:grpSpPr>
       <p:sp>
         <p:nvSpPr>
           <p:cNvPr id="2" name="Rectangle 1"/>
@@ -7619,6 +7830,7 @@
           <a:lstStyle/>
           <a:p>
             <a:pPr algn="ctr"/>
+            <a:endParaRPr/>
           </a:p>
         </p:txBody>
       </p:sp>
@@ -7663,6 +7875,7 @@
           <a:lstStyle/>
           <a:p>
             <a:pPr algn="ctr"/>
+            <a:endParaRPr/>
           </a:p>
         </p:txBody>
       </p:sp>
@@ -7683,7 +7896,7 @@
           <a:noFill/>
         </p:spPr>
         <p:txBody>
-          <a:bodyPr wrap="square" anchor="t" lIns="0" rIns="0" tIns="0" bIns="0">
+          <a:bodyPr wrap="square" lIns="0" tIns="0" rIns="0" bIns="0" anchor="t">
             <a:spAutoFit/>
           </a:bodyPr>
           <a:lstStyle/>
@@ -7741,6 +7954,7 @@
           <a:lstStyle/>
           <a:p>
             <a:pPr algn="ctr"/>
+            <a:endParaRPr/>
           </a:p>
         </p:txBody>
       </p:sp>
@@ -7761,7 +7975,7 @@
           <a:noFill/>
         </p:spPr>
         <p:txBody>
-          <a:bodyPr wrap="square" anchor="t" lIns="0" rIns="0" tIns="0" bIns="0">
+          <a:bodyPr wrap="square" lIns="0" tIns="0" rIns="0" bIns="0" anchor="t">
             <a:spAutoFit/>
           </a:bodyPr>
           <a:lstStyle/>
@@ -7795,7 +8009,7 @@
           <a:noFill/>
         </p:spPr>
         <p:txBody>
-          <a:bodyPr wrap="square" anchor="t" lIns="0" rIns="0" tIns="0" bIns="0">
+          <a:bodyPr wrap="square" lIns="0" tIns="0" rIns="0" bIns="0" anchor="t">
             <a:spAutoFit/>
           </a:bodyPr>
           <a:lstStyle/>
@@ -7830,7 +8044,7 @@
           <a:noFill/>
         </p:spPr>
         <p:txBody>
-          <a:bodyPr wrap="square" anchor="t" lIns="0" rIns="0" tIns="0" bIns="0">
+          <a:bodyPr wrap="square" lIns="0" tIns="0" rIns="0" bIns="0" anchor="t">
             <a:spAutoFit/>
           </a:bodyPr>
           <a:lstStyle/>
@@ -7957,7 +8171,7 @@
           </a:fontRef>
         </p:style>
         <p:txBody>
-          <a:bodyPr rtlCol="0" anchor="t" wrap="square" lIns="182880" tIns="109728"/>
+          <a:bodyPr wrap="square" lIns="182880" tIns="109728" rtlCol="0" anchor="t"/>
           <a:lstStyle/>
           <a:p>
             <a:pPr algn="ctr"/>
@@ -7990,7 +8204,7 @@
           <a:noFill/>
         </p:spPr>
         <p:txBody>
-          <a:bodyPr wrap="square" anchor="t" lIns="0" rIns="0" tIns="0" bIns="0">
+          <a:bodyPr wrap="square" lIns="0" tIns="0" rIns="0" bIns="0" anchor="t">
             <a:spAutoFit/>
           </a:bodyPr>
           <a:lstStyle/>
@@ -8033,7 +8247,7 @@
 </file>
 
 <file path=ppt/slides/slide7.xml><?xml version="1.0" encoding="utf-8"?>
-<p:sld xmlns:a="http://schemas.openxmlformats.org/drawingml/2006/main" xmlns:p="http://schemas.openxmlformats.org/presentationml/2006/main" xmlns:r="http://schemas.openxmlformats.org/officeDocument/2006/relationships">
+<p:sld xmlns:a="http://schemas.openxmlformats.org/drawingml/2006/main" xmlns:r="http://schemas.openxmlformats.org/officeDocument/2006/relationships" xmlns:p="http://schemas.openxmlformats.org/presentationml/2006/main">
   <p:cSld>
     <p:spTree>
       <p:nvGrpSpPr>
@@ -8041,7 +8255,14 @@
         <p:cNvGrpSpPr/>
         <p:nvPr/>
       </p:nvGrpSpPr>
-      <p:grpSpPr/>
+      <p:grpSpPr>
+        <a:xfrm>
+          <a:off x="0" y="0"/>
+          <a:ext cx="0" cy="0"/>
+          <a:chOff x="0" y="0"/>
+          <a:chExt cx="0" cy="0"/>
+        </a:xfrm>
+      </p:grpSpPr>
       <p:sp>
         <p:nvSpPr>
           <p:cNvPr id="2" name="Rectangle 1"/>
@@ -8083,6 +8304,7 @@
           <a:lstStyle/>
           <a:p>
             <a:pPr algn="ctr"/>
+            <a:endParaRPr/>
           </a:p>
         </p:txBody>
       </p:sp>
@@ -8127,6 +8349,7 @@
           <a:lstStyle/>
           <a:p>
             <a:pPr algn="ctr"/>
+            <a:endParaRPr/>
           </a:p>
         </p:txBody>
       </p:sp>
@@ -8147,7 +8370,7 @@
           <a:noFill/>
         </p:spPr>
         <p:txBody>
-          <a:bodyPr wrap="square" anchor="t" lIns="0" rIns="0" tIns="0" bIns="0">
+          <a:bodyPr wrap="square" lIns="0" tIns="0" rIns="0" bIns="0" anchor="t">
             <a:spAutoFit/>
           </a:bodyPr>
           <a:lstStyle/>
@@ -8205,6 +8428,7 @@
           <a:lstStyle/>
           <a:p>
             <a:pPr algn="ctr"/>
+            <a:endParaRPr/>
           </a:p>
         </p:txBody>
       </p:sp>
@@ -8225,7 +8449,7 @@
           <a:noFill/>
         </p:spPr>
         <p:txBody>
-          <a:bodyPr wrap="square" anchor="t" lIns="0" rIns="0" tIns="0" bIns="0">
+          <a:bodyPr wrap="square" lIns="0" tIns="0" rIns="0" bIns="0" anchor="t">
             <a:spAutoFit/>
           </a:bodyPr>
           <a:lstStyle/>
@@ -8259,7 +8483,7 @@
           <a:noFill/>
         </p:spPr>
         <p:txBody>
-          <a:bodyPr wrap="square" anchor="t" lIns="0" rIns="0" tIns="0" bIns="0">
+          <a:bodyPr wrap="square" lIns="0" tIns="0" rIns="0" bIns="0" anchor="t">
             <a:spAutoFit/>
           </a:bodyPr>
           <a:lstStyle/>
@@ -8294,7 +8518,7 @@
           <a:noFill/>
         </p:spPr>
         <p:txBody>
-          <a:bodyPr wrap="square" anchor="t" lIns="0" rIns="0" tIns="0" bIns="0">
+          <a:bodyPr wrap="square" lIns="0" tIns="0" rIns="0" bIns="0" anchor="t">
             <a:spAutoFit/>
           </a:bodyPr>
           <a:lstStyle/>
@@ -8421,7 +8645,7 @@
 </file>
 
 <file path=ppt/slides/slide8.xml><?xml version="1.0" encoding="utf-8"?>
-<p:sld xmlns:a="http://schemas.openxmlformats.org/drawingml/2006/main" xmlns:p="http://schemas.openxmlformats.org/presentationml/2006/main" xmlns:r="http://schemas.openxmlformats.org/officeDocument/2006/relationships">
+<p:sld xmlns:a="http://schemas.openxmlformats.org/drawingml/2006/main" xmlns:r="http://schemas.openxmlformats.org/officeDocument/2006/relationships" xmlns:p="http://schemas.openxmlformats.org/presentationml/2006/main">
   <p:cSld>
     <p:spTree>
       <p:nvGrpSpPr>
@@ -8429,7 +8653,14 @@
         <p:cNvGrpSpPr/>
         <p:nvPr/>
       </p:nvGrpSpPr>
-      <p:grpSpPr/>
+      <p:grpSpPr>
+        <a:xfrm>
+          <a:off x="0" y="0"/>
+          <a:ext cx="0" cy="0"/>
+          <a:chOff x="0" y="0"/>
+          <a:chExt cx="0" cy="0"/>
+        </a:xfrm>
+      </p:grpSpPr>
       <p:sp>
         <p:nvSpPr>
           <p:cNvPr id="2" name="Rectangle 1"/>
@@ -8471,6 +8702,7 @@
           <a:lstStyle/>
           <a:p>
             <a:pPr algn="ctr"/>
+            <a:endParaRPr/>
           </a:p>
         </p:txBody>
       </p:sp>
@@ -8515,6 +8747,7 @@
           <a:lstStyle/>
           <a:p>
             <a:pPr algn="ctr"/>
+            <a:endParaRPr/>
           </a:p>
         </p:txBody>
       </p:sp>
@@ -8535,7 +8768,7 @@
           <a:noFill/>
         </p:spPr>
         <p:txBody>
-          <a:bodyPr wrap="square" anchor="t" lIns="0" rIns="0" tIns="0" bIns="0">
+          <a:bodyPr wrap="square" lIns="0" tIns="0" rIns="0" bIns="0" anchor="t">
             <a:spAutoFit/>
           </a:bodyPr>
           <a:lstStyle/>
@@ -8593,6 +8826,7 @@
           <a:lstStyle/>
           <a:p>
             <a:pPr algn="ctr"/>
+            <a:endParaRPr/>
           </a:p>
         </p:txBody>
       </p:sp>
@@ -8613,7 +8847,7 @@
           <a:noFill/>
         </p:spPr>
         <p:txBody>
-          <a:bodyPr wrap="square" anchor="t" lIns="0" rIns="0" tIns="0" bIns="0">
+          <a:bodyPr wrap="square" lIns="0" tIns="0" rIns="0" bIns="0" anchor="t">
             <a:spAutoFit/>
           </a:bodyPr>
           <a:lstStyle/>
@@ -8647,7 +8881,7 @@
           <a:noFill/>
         </p:spPr>
         <p:txBody>
-          <a:bodyPr wrap="square" anchor="t" lIns="0" rIns="0" tIns="0" bIns="0">
+          <a:bodyPr wrap="square" lIns="0" tIns="0" rIns="0" bIns="0" anchor="t">
             <a:spAutoFit/>
           </a:bodyPr>
           <a:lstStyle/>
@@ -8682,7 +8916,7 @@
           <a:noFill/>
         </p:spPr>
         <p:txBody>
-          <a:bodyPr wrap="square" anchor="t" lIns="0" rIns="0" tIns="0" bIns="0">
+          <a:bodyPr wrap="square" lIns="0" tIns="0" rIns="0" bIns="0" anchor="t">
             <a:spAutoFit/>
           </a:bodyPr>
           <a:lstStyle/>
@@ -8753,12 +8987,11 @@
           </a:fontRef>
         </p:style>
         <p:txBody>
-          <a:bodyPr rtlCol="0" anchor="t" wrap="square" lIns="182880" tIns="109728"/>
-          <a:lstStyle/>
-          <a:p>
-            <a:pPr algn="ctr"/>
-            <a:r>
-              <a:rPr sz="1400" b="0" i="0">
+          <a:bodyPr wrap="square" lIns="182880" tIns="109728" rtlCol="0" anchor="t"/>
+          <a:lstStyle/>
+          <a:p>
+            <a:r>
+              <a:rPr sz="1400" dirty="0">
                 <a:solidFill>
                   <a:srgbClr val="0F172A"/>
                 </a:solidFill>
@@ -8769,35 +9002,59 @@
           </a:p>
           <a:p>
             <a:r>
-              <a:rPr sz="1400" b="0" i="0">
+              <a:rPr sz="1400" b="0" i="0" dirty="0">
                 <a:solidFill>
                   <a:srgbClr val="0F172A"/>
                 </a:solidFill>
                 <a:latin typeface="Consolas"/>
               </a:rPr>
-              <a:t>code --list-extensions   # should list ms-python.python</a:t>
-            </a:r>
-          </a:p>
-          <a:p>
-            <a:r>
-              <a:rPr sz="1400" b="0" i="0">
+              <a:t>code --list-extensions   # should list </a:t>
+            </a:r>
+            <a:r>
+              <a:rPr sz="1400" b="0" i="0" dirty="0" err="1">
                 <a:solidFill>
                   <a:srgbClr val="0F172A"/>
                 </a:solidFill>
                 <a:latin typeface="Consolas"/>
               </a:rPr>
+              <a:t>ms-python.python</a:t>
+            </a:r>
+            <a:endParaRPr sz="1400" b="0" i="0" dirty="0">
+              <a:solidFill>
+                <a:srgbClr val="0F172A"/>
+              </a:solidFill>
+              <a:latin typeface="Consolas"/>
+            </a:endParaRPr>
+          </a:p>
+          <a:p>
+            <a:r>
+              <a:rPr sz="1400" b="0" i="0" dirty="0">
+                <a:solidFill>
+                  <a:srgbClr val="0F172A"/>
+                </a:solidFill>
+                <a:latin typeface="Consolas"/>
+              </a:rPr>
               <a:t>python --version         # should print Python 3.14.6</a:t>
             </a:r>
           </a:p>
           <a:p>
             <a:r>
-              <a:rPr sz="1400" b="0" i="0">
+              <a:rPr sz="1400" b="0" i="0" dirty="0" err="1">
                 <a:solidFill>
                   <a:srgbClr val="0F172A"/>
                 </a:solidFill>
                 <a:latin typeface="Consolas"/>
               </a:rPr>
-              <a:t>py --list                # Windows: all installed versions</a:t>
+              <a:t>py</a:t>
+            </a:r>
+            <a:r>
+              <a:rPr sz="1400" b="0" i="0" dirty="0">
+                <a:solidFill>
+                  <a:srgbClr val="0F172A"/>
+                </a:solidFill>
+                <a:latin typeface="Consolas"/>
+              </a:rPr>
+              <a:t> --list                # Windows: all installed versions</a:t>
             </a:r>
           </a:p>
         </p:txBody>
@@ -8819,7 +9076,7 @@
           <a:noFill/>
         </p:spPr>
         <p:txBody>
-          <a:bodyPr wrap="square" anchor="t" lIns="0" rIns="0" tIns="0" bIns="0">
+          <a:bodyPr wrap="square" lIns="0" tIns="0" rIns="0" bIns="0" anchor="t">
             <a:spAutoFit/>
           </a:bodyPr>
           <a:lstStyle/>
@@ -8918,7 +9175,7 @@
 </file>
 
 <file path=ppt/slides/slide9.xml><?xml version="1.0" encoding="utf-8"?>
-<p:sld xmlns:a="http://schemas.openxmlformats.org/drawingml/2006/main" xmlns:p="http://schemas.openxmlformats.org/presentationml/2006/main" xmlns:r="http://schemas.openxmlformats.org/officeDocument/2006/relationships">
+<p:sld xmlns:a="http://schemas.openxmlformats.org/drawingml/2006/main" xmlns:r="http://schemas.openxmlformats.org/officeDocument/2006/relationships" xmlns:p="http://schemas.openxmlformats.org/presentationml/2006/main">
   <p:cSld>
     <p:spTree>
       <p:nvGrpSpPr>
@@ -8926,7 +9183,14 @@
         <p:cNvGrpSpPr/>
         <p:nvPr/>
       </p:nvGrpSpPr>
-      <p:grpSpPr/>
+      <p:grpSpPr>
+        <a:xfrm>
+          <a:off x="0" y="0"/>
+          <a:ext cx="0" cy="0"/>
+          <a:chOff x="0" y="0"/>
+          <a:chExt cx="0" cy="0"/>
+        </a:xfrm>
+      </p:grpSpPr>
       <p:sp>
         <p:nvSpPr>
           <p:cNvPr id="2" name="Rectangle 1"/>
@@ -8968,6 +9232,7 @@
           <a:lstStyle/>
           <a:p>
             <a:pPr algn="ctr"/>
+            <a:endParaRPr/>
           </a:p>
         </p:txBody>
       </p:sp>
@@ -9012,6 +9277,7 @@
           <a:lstStyle/>
           <a:p>
             <a:pPr algn="ctr"/>
+            <a:endParaRPr/>
           </a:p>
         </p:txBody>
       </p:sp>
@@ -9032,7 +9298,7 @@
           <a:noFill/>
         </p:spPr>
         <p:txBody>
-          <a:bodyPr wrap="square" anchor="t" lIns="0" rIns="0" tIns="0" bIns="0">
+          <a:bodyPr wrap="square" lIns="0" tIns="0" rIns="0" bIns="0" anchor="t">
             <a:spAutoFit/>
           </a:bodyPr>
           <a:lstStyle/>
@@ -9090,6 +9356,7 @@
           <a:lstStyle/>
           <a:p>
             <a:pPr algn="ctr"/>
+            <a:endParaRPr/>
           </a:p>
         </p:txBody>
       </p:sp>
@@ -9110,7 +9377,7 @@
           <a:noFill/>
         </p:spPr>
         <p:txBody>
-          <a:bodyPr wrap="square" anchor="t" lIns="0" rIns="0" tIns="0" bIns="0">
+          <a:bodyPr wrap="square" lIns="0" tIns="0" rIns="0" bIns="0" anchor="t">
             <a:spAutoFit/>
           </a:bodyPr>
           <a:lstStyle/>
@@ -9144,7 +9411,7 @@
           <a:noFill/>
         </p:spPr>
         <p:txBody>
-          <a:bodyPr wrap="square" anchor="t" lIns="0" rIns="0" tIns="0" bIns="0">
+          <a:bodyPr wrap="square" lIns="0" tIns="0" rIns="0" bIns="0" anchor="t">
             <a:spAutoFit/>
           </a:bodyPr>
           <a:lstStyle/>
@@ -9179,7 +9446,7 @@
           <a:noFill/>
         </p:spPr>
         <p:txBody>
-          <a:bodyPr wrap="square" anchor="t" lIns="0" rIns="0" tIns="0" bIns="0">
+          <a:bodyPr wrap="square" lIns="0" tIns="0" rIns="0" bIns="0" anchor="t">
             <a:spAutoFit/>
           </a:bodyPr>
           <a:lstStyle/>
@@ -9334,7 +9601,7 @@
           </a:fontRef>
         </p:style>
         <p:txBody>
-          <a:bodyPr rtlCol="0" anchor="t" wrap="square" lIns="182880" tIns="109728"/>
+          <a:bodyPr wrap="square" lIns="182880" tIns="109728" rtlCol="0" anchor="t"/>
           <a:lstStyle/>
           <a:p>
             <a:pPr algn="ctr"/>
@@ -9389,7 +9656,7 @@
           <a:noFill/>
         </p:spPr>
         <p:txBody>
-          <a:bodyPr wrap="square" anchor="t" lIns="0" rIns="0" tIns="0" bIns="0">
+          <a:bodyPr wrap="square" lIns="0" tIns="0" rIns="0" bIns="0" anchor="t">
             <a:spAutoFit/>
           </a:bodyPr>
           <a:lstStyle/>

--- a/Ch0_Tools_You_Need.pptx
+++ b/Ch0_Tools_You_Need.pptx
@@ -3681,7 +3681,7 @@
         <p:spPr>
           <a:xfrm>
             <a:off x="640080" y="3657600"/>
-            <a:ext cx="10972800" cy="4480560"/>
+            <a:ext cx="10972800" cy="713016"/>
           </a:xfrm>
           <a:prstGeom prst="rect">
             <a:avLst/>
@@ -3703,7 +3703,7 @@
               </a:spcAft>
             </a:pPr>
             <a:r>
-              <a:rPr sz="1900" b="1" i="0">
+              <a:rPr sz="1900" b="1" i="0" dirty="0">
                 <a:solidFill>
                   <a:srgbClr val="0EA5E9"/>
                 </a:solidFill>
@@ -3712,7 +3712,7 @@
               <a:t>▪  </a:t>
             </a:r>
             <a:r>
-              <a:rPr sz="1900" b="0" i="0">
+              <a:rPr sz="1900" b="0" i="0" dirty="0">
                 <a:solidFill>
                   <a:srgbClr val="334155"/>
                 </a:solidFill>
@@ -3731,7 +3731,7 @@
               </a:spcAft>
             </a:pPr>
             <a:r>
-              <a:rPr sz="1900" b="1" i="0">
+              <a:rPr sz="1900" b="1" i="0" dirty="0">
                 <a:solidFill>
                   <a:srgbClr val="0EA5E9"/>
                 </a:solidFill>
@@ -3740,41 +3740,112 @@
               <a:t>▪  </a:t>
             </a:r>
             <a:r>
-              <a:rPr sz="1900" b="0" i="0">
+              <a:rPr sz="1900" b="0" i="0" dirty="0">
                 <a:solidFill>
                   <a:srgbClr val="334155"/>
                 </a:solidFill>
                 <a:latin typeface="Segoe UI"/>
               </a:rPr>
-              <a:t>Core: ultralytics, opencv-python, numpy, mediapipe,</a:t>
-            </a:r>
-          </a:p>
-          <a:p>
-            <a:pPr lvl="1">
-              <a:spcBef>
-                <a:spcPts val="0"/>
-              </a:spcBef>
-              <a:spcAft>
-                <a:spcPts val="1000"/>
-              </a:spcAft>
-            </a:pPr>
-            <a:r>
-              <a:rPr sz="1700" b="0" i="0">
-                <a:solidFill>
-                  <a:srgbClr val="94A3B8"/>
-                </a:solidFill>
-                <a:latin typeface="Segoe UI"/>
-              </a:rPr>
-              <a:t>      –  </a:t>
-            </a:r>
-            <a:r>
-              <a:rPr sz="1700" b="0" i="0">
+              <a:t>Core: </a:t>
+            </a:r>
+            <a:r>
+              <a:rPr sz="1900" b="0" i="0" dirty="0" err="1">
                 <a:solidFill>
                   <a:srgbClr val="334155"/>
                 </a:solidFill>
                 <a:latin typeface="Segoe UI"/>
               </a:rPr>
-              <a:t>tensorflow, teachable-machine, requests, urllib3</a:t>
+              <a:t>ultralytics</a:t>
+            </a:r>
+            <a:r>
+              <a:rPr sz="1900" b="0" i="0" dirty="0">
+                <a:solidFill>
+                  <a:srgbClr val="334155"/>
+                </a:solidFill>
+                <a:latin typeface="Segoe UI"/>
+              </a:rPr>
+              <a:t>, </a:t>
+            </a:r>
+            <a:r>
+              <a:rPr sz="1900" b="0" i="0" dirty="0" err="1">
+                <a:solidFill>
+                  <a:srgbClr val="334155"/>
+                </a:solidFill>
+                <a:latin typeface="Segoe UI"/>
+              </a:rPr>
+              <a:t>opencv</a:t>
+            </a:r>
+            <a:r>
+              <a:rPr sz="1900" b="0" i="0" dirty="0">
+                <a:solidFill>
+                  <a:srgbClr val="334155"/>
+                </a:solidFill>
+                <a:latin typeface="Segoe UI"/>
+              </a:rPr>
+              <a:t>-python, </a:t>
+            </a:r>
+            <a:r>
+              <a:rPr sz="1900" b="0" i="0" dirty="0" err="1">
+                <a:solidFill>
+                  <a:srgbClr val="334155"/>
+                </a:solidFill>
+                <a:latin typeface="Segoe UI"/>
+              </a:rPr>
+              <a:t>numpy</a:t>
+            </a:r>
+            <a:r>
+              <a:rPr sz="1900" b="0" i="0" dirty="0">
+                <a:solidFill>
+                  <a:srgbClr val="334155"/>
+                </a:solidFill>
+                <a:latin typeface="Segoe UI"/>
+              </a:rPr>
+              <a:t>, </a:t>
+            </a:r>
+            <a:r>
+              <a:rPr sz="1900" b="0" i="0" dirty="0" err="1">
+                <a:solidFill>
+                  <a:srgbClr val="334155"/>
+                </a:solidFill>
+                <a:latin typeface="Segoe UI"/>
+              </a:rPr>
+              <a:t>mediapipe</a:t>
+            </a:r>
+            <a:r>
+              <a:rPr sz="1900" b="0" i="0" dirty="0">
+                <a:solidFill>
+                  <a:srgbClr val="334155"/>
+                </a:solidFill>
+                <a:latin typeface="Segoe UI"/>
+              </a:rPr>
+              <a:t>,</a:t>
+            </a:r>
+            <a:r>
+              <a:rPr lang="en-US" sz="1900" b="0" i="0" dirty="0">
+                <a:solidFill>
+                  <a:srgbClr val="334155"/>
+                </a:solidFill>
+                <a:latin typeface="Segoe UI"/>
+              </a:rPr>
+              <a:t> </a:t>
+            </a:r>
+            <a:r>
+              <a:rPr sz="1900" dirty="0" err="1">
+                <a:solidFill>
+                  <a:srgbClr val="334155"/>
+                </a:solidFill>
+                <a:latin typeface="Segoe UI"/>
+              </a:rPr>
+              <a:t>tensorflow</a:t>
+            </a:r>
+            <a:r>
+              <a:rPr sz="1900" dirty="0">
+                <a:solidFill>
+                  <a:srgbClr val="334155"/>
+                </a:solidFill>
+                <a:latin typeface="Segoe UI"/>
+              </a:rPr>
+              <a:t>, teachable-machine, requests, urllib3</a:t>
             </a:r>
           </a:p>
         </p:txBody>
@@ -4811,7 +4882,7 @@
         <p:spPr>
           <a:xfrm>
             <a:off x="640080" y="1554480"/>
-            <a:ext cx="10972800" cy="1280160"/>
+            <a:ext cx="10972800" cy="2303195"/>
           </a:xfrm>
           <a:prstGeom prst="rect">
             <a:avLst/>
@@ -4833,7 +4904,7 @@
               </a:spcAft>
             </a:pPr>
             <a:r>
-              <a:rPr sz="1900" b="1" i="0">
+              <a:rPr sz="1900" b="1" i="0" dirty="0">
                 <a:solidFill>
                   <a:srgbClr val="0EA5E9"/>
                 </a:solidFill>
@@ -4842,7 +4913,7 @@
               <a:t>▪  </a:t>
             </a:r>
             <a:r>
-              <a:rPr sz="1900" b="0" i="0">
+              <a:rPr sz="1900" b="0" i="0" dirty="0">
                 <a:solidFill>
                   <a:srgbClr val="334155"/>
                 </a:solidFill>
@@ -4861,7 +4932,7 @@
               </a:spcAft>
             </a:pPr>
             <a:r>
-              <a:rPr sz="1900" b="1" i="0">
+              <a:rPr sz="1900" b="1" i="0" dirty="0">
                 <a:solidFill>
                   <a:srgbClr val="0EA5E9"/>
                 </a:solidFill>
@@ -4870,14 +4941,110 @@
               <a:t>▪  </a:t>
             </a:r>
             <a:r>
-              <a:rPr sz="1900" b="0" i="0">
+              <a:rPr sz="1900" b="0" i="0" dirty="0">
                 <a:solidFill>
                   <a:srgbClr val="334155"/>
                 </a:solidFill>
                 <a:latin typeface="Segoe UI"/>
               </a:rPr>
-              <a:t>Turn off auto-update in VS Code settings:</a:t>
-            </a:r>
+              <a:t>Turn off auto-update in VS Code settings</a:t>
+            </a:r>
+            <a:r>
+              <a:rPr lang="en-US" sz="1900" dirty="0">
+                <a:solidFill>
+                  <a:srgbClr val="334155"/>
+                </a:solidFill>
+                <a:latin typeface="Segoe UI"/>
+              </a:rPr>
+              <a:t> by editing </a:t>
+            </a:r>
+            <a:r>
+              <a:rPr lang="en-US" sz="1900" dirty="0" err="1">
+                <a:solidFill>
+                  <a:srgbClr val="334155"/>
+                </a:solidFill>
+                <a:latin typeface="Segoe UI"/>
+              </a:rPr>
+              <a:t>settings.json</a:t>
+            </a:r>
+            <a:r>
+              <a:rPr lang="en-US" sz="1900" dirty="0">
+                <a:solidFill>
+                  <a:srgbClr val="334155"/>
+                </a:solidFill>
+                <a:latin typeface="Segoe UI"/>
+              </a:rPr>
+              <a:t> file:</a:t>
+            </a:r>
+          </a:p>
+          <a:p>
+            <a:pPr marL="457200" indent="-457200">
+              <a:buFont typeface="+mj-lt"/>
+              <a:buAutoNum type="arabicPeriod"/>
+            </a:pPr>
+            <a:r>
+              <a:rPr lang="en-US" sz="1900" dirty="0">
+                <a:solidFill>
+                  <a:srgbClr val="334155"/>
+                </a:solidFill>
+                <a:latin typeface="Segoe UI"/>
+              </a:rPr>
+              <a:t>Open the VS Code Command Palette by pressing Ctrl + Shift + P (Windows/Linux) or </a:t>
+            </a:r>
+            <a:r>
+              <a:rPr lang="en-US" sz="1900" dirty="0" err="1">
+                <a:solidFill>
+                  <a:srgbClr val="334155"/>
+                </a:solidFill>
+                <a:latin typeface="Segoe UI"/>
+              </a:rPr>
+              <a:t>Cmd</a:t>
+            </a:r>
+            <a:r>
+              <a:rPr lang="en-US" sz="1900" dirty="0">
+                <a:solidFill>
+                  <a:srgbClr val="334155"/>
+                </a:solidFill>
+                <a:latin typeface="Segoe UI"/>
+              </a:rPr>
+              <a:t> + Shift + P (macOS).</a:t>
+            </a:r>
+          </a:p>
+          <a:p>
+            <a:pPr marL="457200" indent="-457200">
+              <a:buFont typeface="+mj-lt"/>
+              <a:buAutoNum type="arabicPeriod"/>
+            </a:pPr>
+            <a:r>
+              <a:rPr lang="en-US" sz="1900" dirty="0">
+                <a:solidFill>
+                  <a:srgbClr val="334155"/>
+                </a:solidFill>
+                <a:latin typeface="Segoe UI"/>
+              </a:rPr>
+              <a:t>Type "Preferences: Open User Settings (JSON)" and select it from the list.</a:t>
+            </a:r>
+          </a:p>
+          <a:p>
+            <a:pPr marL="457200" indent="-457200">
+              <a:buFont typeface="+mj-lt"/>
+              <a:buAutoNum type="arabicPeriod"/>
+            </a:pPr>
+            <a:r>
+              <a:rPr lang="en-US" sz="1900" dirty="0">
+                <a:solidFill>
+                  <a:srgbClr val="334155"/>
+                </a:solidFill>
+                <a:latin typeface="Segoe UI"/>
+              </a:rPr>
+              <a:t>Paste the following three configuration lines inside the curly brackets {}. Be sure to add a comma at the end of your existing settings if you place them in the middle of the file. </a:t>
+            </a:r>
+            <a:endParaRPr sz="1900" b="0" i="0" dirty="0">
+              <a:solidFill>
+                <a:srgbClr val="334155"/>
+              </a:solidFill>
+              <a:latin typeface="Segoe UI"/>
+            </a:endParaRPr>
           </a:p>
         </p:txBody>
       </p:sp>
@@ -4889,7 +5056,7 @@
         </p:nvSpPr>
         <p:spPr>
           <a:xfrm>
-            <a:off x="822960" y="2834640"/>
+            <a:off x="640080" y="4106424"/>
             <a:ext cx="10515600" cy="1207008"/>
           </a:xfrm>
           <a:prstGeom prst="rect">
@@ -5017,8 +5184,8 @@
         </p:nvSpPr>
         <p:spPr>
           <a:xfrm>
-            <a:off x="640080" y="4297680"/>
-            <a:ext cx="10972800" cy="4480560"/>
+            <a:off x="566928" y="5500381"/>
+            <a:ext cx="10074303" cy="713016"/>
           </a:xfrm>
           <a:prstGeom prst="rect">
             <a:avLst/>
@@ -5040,7 +5207,7 @@
               </a:spcAft>
             </a:pPr>
             <a:r>
-              <a:rPr sz="1900" b="1" i="0">
+              <a:rPr sz="1900" b="1" i="0" dirty="0">
                 <a:solidFill>
                   <a:srgbClr val="0EA5E9"/>
                 </a:solidFill>
@@ -5049,7 +5216,7 @@
               <a:t>▪  </a:t>
             </a:r>
             <a:r>
-              <a:rPr sz="1900" b="0" i="0">
+              <a:rPr sz="1900" b="0" i="0" dirty="0">
                 <a:solidFill>
                   <a:srgbClr val="334155"/>
                 </a:solidFill>
@@ -5068,7 +5235,7 @@
               </a:spcAft>
             </a:pPr>
             <a:r>
-              <a:rPr sz="1900" b="1" i="0">
+              <a:rPr sz="1900" b="1" i="0" dirty="0">
                 <a:solidFill>
                   <a:srgbClr val="0EA5E9"/>
                 </a:solidFill>
@@ -5077,7 +5244,7 @@
               <a:t>▪  </a:t>
             </a:r>
             <a:r>
-              <a:rPr sz="1900" b="0" i="0">
+              <a:rPr sz="1900" b="0" i="0" dirty="0">
                 <a:solidFill>
                   <a:srgbClr val="334155"/>
                 </a:solidFill>
@@ -6238,7 +6405,7 @@
         <p:spPr>
           <a:xfrm>
             <a:off x="640080" y="1600200"/>
-            <a:ext cx="10972800" cy="4480560"/>
+            <a:ext cx="10972800" cy="3236784"/>
           </a:xfrm>
           <a:prstGeom prst="rect">
             <a:avLst/>
@@ -6260,14 +6427,29 @@
               </a:spcAft>
             </a:pPr>
             <a:r>
-              <a:rPr sz="2100" b="1" i="0">
+              <a:rPr sz="2100" b="1" i="0" dirty="0">
                 <a:solidFill>
                   <a:srgbClr val="0EA5E9"/>
                 </a:solidFill>
                 <a:latin typeface="Segoe UI"/>
               </a:rPr>
-              <a:t>Early chapters — in the browser &amp; Google Colab</a:t>
-            </a:r>
+              <a:t>Early chapters — in the browser &amp; Google </a:t>
+            </a:r>
+            <a:r>
+              <a:rPr sz="2100" b="1" i="0" dirty="0" err="1">
+                <a:solidFill>
+                  <a:srgbClr val="0EA5E9"/>
+                </a:solidFill>
+                <a:latin typeface="Segoe UI"/>
+              </a:rPr>
+              <a:t>Colab</a:t>
+            </a:r>
+            <a:endParaRPr sz="2100" b="1" i="0" dirty="0">
+              <a:solidFill>
+                <a:srgbClr val="0EA5E9"/>
+              </a:solidFill>
+              <a:latin typeface="Segoe UI"/>
+            </a:endParaRPr>
           </a:p>
           <a:p>
             <a:pPr>
@@ -6279,7 +6461,7 @@
               </a:spcAft>
             </a:pPr>
             <a:r>
-              <a:rPr sz="1900" b="1" i="0">
+              <a:rPr sz="1900" b="1" i="0" dirty="0">
                 <a:solidFill>
                   <a:srgbClr val="0EA5E9"/>
                 </a:solidFill>
@@ -6288,7 +6470,7 @@
               <a:t>▪  </a:t>
             </a:r>
             <a:r>
-              <a:rPr sz="1900" b="0" i="0">
+              <a:rPr sz="1900" b="0" i="0" dirty="0">
                 <a:solidFill>
                   <a:srgbClr val="334155"/>
                 </a:solidFill>
@@ -6307,7 +6489,7 @@
               </a:spcAft>
             </a:pPr>
             <a:r>
-              <a:rPr sz="1900" b="1" i="0">
+              <a:rPr sz="1900" b="1" i="0" dirty="0">
                 <a:solidFill>
                   <a:srgbClr val="0EA5E9"/>
                 </a:solidFill>
@@ -6316,14 +6498,29 @@
               <a:t>▪  </a:t>
             </a:r>
             <a:r>
-              <a:rPr sz="1900" b="0" i="0">
+              <a:rPr sz="1900" b="0" i="0" dirty="0">
                 <a:solidFill>
                   <a:srgbClr val="334155"/>
                 </a:solidFill>
                 <a:latin typeface="Segoe UI"/>
               </a:rPr>
-              <a:t>ML and computer-vision notebooks run in Google Colab</a:t>
-            </a:r>
+              <a:t>ML notebooks run in Google </a:t>
+            </a:r>
+            <a:r>
+              <a:rPr sz="1900" b="0" i="0" dirty="0" err="1">
+                <a:solidFill>
+                  <a:srgbClr val="334155"/>
+                </a:solidFill>
+                <a:latin typeface="Segoe UI"/>
+              </a:rPr>
+              <a:t>Colab</a:t>
+            </a:r>
+            <a:endParaRPr sz="1900" b="0" i="0" dirty="0">
+              <a:solidFill>
+                <a:srgbClr val="334155"/>
+              </a:solidFill>
+              <a:latin typeface="Segoe UI"/>
+            </a:endParaRPr>
           </a:p>
           <a:p>
             <a:pPr lvl="1">
@@ -6335,7 +6532,7 @@
               </a:spcAft>
             </a:pPr>
             <a:r>
-              <a:rPr sz="1700" b="0" i="0">
+              <a:rPr sz="1700" b="0" i="0" dirty="0">
                 <a:solidFill>
                   <a:srgbClr val="94A3B8"/>
                 </a:solidFill>
@@ -6344,7 +6541,7 @@
               <a:t>      –  </a:t>
             </a:r>
             <a:r>
-              <a:rPr sz="1700" b="0" i="0">
+              <a:rPr sz="1700" b="0" i="0" dirty="0">
                 <a:solidFill>
                   <a:srgbClr val="334155"/>
                 </a:solidFill>
@@ -6363,7 +6560,7 @@
               </a:spcAft>
             </a:pPr>
             <a:r>
-              <a:rPr sz="2100" b="1" i="0">
+              <a:rPr sz="2100" b="1" i="0" dirty="0">
                 <a:solidFill>
                   <a:srgbClr val="0EA5E9"/>
                 </a:solidFill>
@@ -6382,7 +6579,7 @@
               </a:spcAft>
             </a:pPr>
             <a:r>
-              <a:rPr sz="1900" b="1" i="0">
+              <a:rPr sz="1900" b="1" i="0" dirty="0">
                 <a:solidFill>
                   <a:srgbClr val="0EA5E9"/>
                 </a:solidFill>
@@ -6391,14 +6588,29 @@
               <a:t>▪  </a:t>
             </a:r>
             <a:r>
-              <a:rPr sz="1900" b="0" i="0">
+              <a:rPr sz="1900" b="0" i="0" dirty="0">
                 <a:solidFill>
                   <a:srgbClr val="334155"/>
                 </a:solidFill>
                 <a:latin typeface="Segoe UI"/>
               </a:rPr>
-              <a:t>You deploy code to a real robot over WiFi</a:t>
-            </a:r>
+              <a:t>You deploy code to a real robot over </a:t>
+            </a:r>
+            <a:r>
+              <a:rPr sz="1900" b="0" i="0" dirty="0" err="1">
+                <a:solidFill>
+                  <a:srgbClr val="334155"/>
+                </a:solidFill>
+                <a:latin typeface="Segoe UI"/>
+              </a:rPr>
+              <a:t>WiFi</a:t>
+            </a:r>
+            <a:endParaRPr sz="1900" b="0" i="0" dirty="0">
+              <a:solidFill>
+                <a:srgbClr val="334155"/>
+              </a:solidFill>
+              <a:latin typeface="Segoe UI"/>
+            </a:endParaRPr>
           </a:p>
           <a:p>
             <a:pPr>
@@ -6410,7 +6622,7 @@
               </a:spcAft>
             </a:pPr>
             <a:r>
-              <a:rPr sz="1900" b="1" i="0">
+              <a:rPr sz="1900" b="1" i="0" dirty="0">
                 <a:solidFill>
                   <a:srgbClr val="0EA5E9"/>
                 </a:solidFill>
@@ -6419,7 +6631,7 @@
               <a:t>▪  </a:t>
             </a:r>
             <a:r>
-              <a:rPr sz="1900" b="0" i="0">
+              <a:rPr sz="1900" b="0" i="0" dirty="0">
                 <a:solidFill>
                   <a:srgbClr val="334155"/>
                 </a:solidFill>
@@ -6438,7 +6650,7 @@
               </a:spcAft>
             </a:pPr>
             <a:r>
-              <a:rPr sz="1700" b="0" i="0">
+              <a:rPr sz="1700" b="0" i="0" dirty="0">
                 <a:solidFill>
                   <a:srgbClr val="94A3B8"/>
                 </a:solidFill>
@@ -6447,7 +6659,7 @@
               <a:t>      –  </a:t>
             </a:r>
             <a:r>
-              <a:rPr sz="1700" b="0" i="0">
+              <a:rPr sz="1700" b="0" i="0" dirty="0">
                 <a:solidFill>
                   <a:srgbClr val="334155"/>
                 </a:solidFill>
@@ -6730,7 +6942,7 @@
         <p:spPr>
           <a:xfrm>
             <a:off x="640080" y="1600200"/>
-            <a:ext cx="10972800" cy="4480560"/>
+            <a:ext cx="10972800" cy="2333972"/>
           </a:xfrm>
           <a:prstGeom prst="rect">
             <a:avLst/>
@@ -6752,7 +6964,7 @@
               </a:spcAft>
             </a:pPr>
             <a:r>
-              <a:rPr sz="1900" b="1" i="0">
+              <a:rPr sz="1900" b="1" i="0" dirty="0">
                 <a:solidFill>
                   <a:srgbClr val="0EA5E9"/>
                 </a:solidFill>
@@ -6761,7 +6973,7 @@
               <a:t>▪  </a:t>
             </a:r>
             <a:r>
-              <a:rPr sz="1900" b="0" i="0">
+              <a:rPr sz="1900" b="0" i="0" dirty="0">
                 <a:solidFill>
                   <a:srgbClr val="334155"/>
                 </a:solidFill>
@@ -6780,7 +6992,7 @@
               </a:spcAft>
             </a:pPr>
             <a:r>
-              <a:rPr sz="1700" b="0" i="0">
+              <a:rPr sz="1700" b="0" i="0" dirty="0">
                 <a:solidFill>
                   <a:srgbClr val="94A3B8"/>
                 </a:solidFill>
@@ -6789,13 +7001,67 @@
               <a:t>      –  </a:t>
             </a:r>
             <a:r>
-              <a:rPr sz="1700" b="0" i="0">
+              <a:rPr sz="1700" b="0" i="0" dirty="0">
                 <a:solidFill>
                   <a:srgbClr val="334155"/>
                 </a:solidFill>
                 <a:latin typeface="Segoe UI"/>
               </a:rPr>
-              <a:t>Powered by CPython 3.12 compiled to WebAssembly (Pyodide)</a:t>
+              <a:t>Powered by </a:t>
+            </a:r>
+            <a:r>
+              <a:rPr sz="1700" b="0" i="0" dirty="0" err="1">
+                <a:solidFill>
+                  <a:srgbClr val="334155"/>
+                </a:solidFill>
+                <a:latin typeface="Segoe UI"/>
+              </a:rPr>
+              <a:t>CPython</a:t>
+            </a:r>
+            <a:r>
+              <a:rPr sz="1700" b="0" i="0" dirty="0">
+                <a:solidFill>
+                  <a:srgbClr val="334155"/>
+                </a:solidFill>
+                <a:latin typeface="Segoe UI"/>
+              </a:rPr>
+              <a:t> 3.12 compiled to </a:t>
+            </a:r>
+            <a:r>
+              <a:rPr sz="1700" b="0" i="0" dirty="0" err="1">
+                <a:solidFill>
+                  <a:srgbClr val="334155"/>
+                </a:solidFill>
+                <a:latin typeface="Segoe UI"/>
+              </a:rPr>
+              <a:t>WebAssembly</a:t>
+            </a:r>
+            <a:r>
+              <a:rPr sz="1700" b="0" i="0" dirty="0">
+                <a:solidFill>
+                  <a:srgbClr val="334155"/>
+                </a:solidFill>
+                <a:latin typeface="Segoe UI"/>
+              </a:rPr>
+              <a:t> (</a:t>
+            </a:r>
+            <a:r>
+              <a:rPr sz="1700" b="0" i="0" dirty="0" err="1">
+                <a:solidFill>
+                  <a:srgbClr val="334155"/>
+                </a:solidFill>
+                <a:latin typeface="Segoe UI"/>
+              </a:rPr>
+              <a:t>Pyodide</a:t>
+            </a:r>
+            <a:r>
+              <a:rPr sz="1700" b="0" i="0" dirty="0">
+                <a:solidFill>
+                  <a:srgbClr val="334155"/>
+                </a:solidFill>
+                <a:latin typeface="Segoe UI"/>
+              </a:rPr>
+              <a:t>)</a:t>
             </a:r>
           </a:p>
           <a:p>
@@ -6808,7 +7074,7 @@
               </a:spcAft>
             </a:pPr>
             <a:r>
-              <a:rPr sz="1900" b="1" i="0">
+              <a:rPr sz="1900" b="1" i="0" dirty="0">
                 <a:solidFill>
                   <a:srgbClr val="0EA5E9"/>
                 </a:solidFill>
@@ -6817,13 +7083,31 @@
               <a:t>▪  </a:t>
             </a:r>
             <a:r>
-              <a:rPr sz="1900" b="0" i="0">
+              <a:rPr sz="1900" b="0" i="0" dirty="0">
                 <a:solidFill>
                   <a:srgbClr val="334155"/>
                 </a:solidFill>
                 <a:latin typeface="Segoe UI"/>
               </a:rPr>
-              <a:t>Use Google Colab for the ML &amp; vision notebooks</a:t>
+              <a:t>Use Google </a:t>
+            </a:r>
+            <a:r>
+              <a:rPr sz="1900" b="0" i="0" dirty="0" err="1">
+                <a:solidFill>
+                  <a:srgbClr val="334155"/>
+                </a:solidFill>
+                <a:latin typeface="Segoe UI"/>
+              </a:rPr>
+              <a:t>Colab</a:t>
+            </a:r>
+            <a:r>
+              <a:rPr sz="1900" b="0" i="0" dirty="0">
+                <a:solidFill>
+                  <a:srgbClr val="334155"/>
+                </a:solidFill>
+                <a:latin typeface="Segoe UI"/>
+              </a:rPr>
+              <a:t> for the ML notebooks</a:t>
             </a:r>
           </a:p>
           <a:p>
@@ -6836,7 +7120,7 @@
               </a:spcAft>
             </a:pPr>
             <a:r>
-              <a:rPr sz="1700" b="0" i="0">
+              <a:rPr sz="1700" b="0" i="0" dirty="0">
                 <a:solidFill>
                   <a:srgbClr val="94A3B8"/>
                 </a:solidFill>
@@ -6845,7 +7129,7 @@
               <a:t>      –  </a:t>
             </a:r>
             <a:r>
-              <a:rPr sz="1700" b="0" i="0">
+              <a:rPr sz="1700" b="0" i="0" dirty="0">
                 <a:solidFill>
                   <a:srgbClr val="334155"/>
                 </a:solidFill>
@@ -6864,7 +7148,7 @@
               </a:spcAft>
             </a:pPr>
             <a:r>
-              <a:rPr sz="1900" b="1" i="0">
+              <a:rPr sz="1900" b="1" i="0" dirty="0">
                 <a:solidFill>
                   <a:srgbClr val="0EA5E9"/>
                 </a:solidFill>
@@ -6873,7 +7157,7 @@
               <a:t>▪  </a:t>
             </a:r>
             <a:r>
-              <a:rPr sz="1900" b="0" i="0">
+              <a:rPr sz="1900" b="0" i="0" dirty="0">
                 <a:solidFill>
                   <a:srgbClr val="334155"/>
                 </a:solidFill>
@@ -6892,7 +7176,7 @@
               </a:spcAft>
             </a:pPr>
             <a:r>
-              <a:rPr sz="1900" b="1" i="0">
+              <a:rPr sz="1900" b="1" i="0" dirty="0">
                 <a:solidFill>
                   <a:srgbClr val="0EA5E9"/>
                 </a:solidFill>
@@ -6901,7 +7185,7 @@
               <a:t>▪  </a:t>
             </a:r>
             <a:r>
-              <a:rPr sz="1900" b="0" i="0">
+              <a:rPr sz="1900" b="0" i="0" dirty="0">
                 <a:solidFill>
                   <a:srgbClr val="334155"/>
                 </a:solidFill>
@@ -7184,7 +7468,7 @@
         <p:spPr>
           <a:xfrm>
             <a:off x="640080" y="1737360"/>
-            <a:ext cx="10972800" cy="4480560"/>
+            <a:ext cx="10972800" cy="2929007"/>
           </a:xfrm>
           <a:prstGeom prst="rect">
             <a:avLst/>
@@ -7206,7 +7490,7 @@
               </a:spcAft>
             </a:pPr>
             <a:r>
-              <a:rPr sz="2200" b="1" i="0">
+              <a:rPr sz="2200" b="1" i="0" dirty="0">
                 <a:solidFill>
                   <a:srgbClr val="0EA5E9"/>
                 </a:solidFill>
@@ -7215,7 +7499,7 @@
               <a:t>▪  </a:t>
             </a:r>
             <a:r>
-              <a:rPr sz="2200" b="0" i="0">
+              <a:rPr sz="2200" b="0" i="0" dirty="0">
                 <a:solidFill>
                   <a:srgbClr val="334155"/>
                 </a:solidFill>
@@ -7234,7 +7518,7 @@
               </a:spcAft>
             </a:pPr>
             <a:r>
-              <a:rPr sz="2200" b="1" i="0">
+              <a:rPr sz="2200" b="1" i="0" dirty="0">
                 <a:solidFill>
                   <a:srgbClr val="0EA5E9"/>
                 </a:solidFill>
@@ -7243,7 +7527,7 @@
               <a:t>▪  </a:t>
             </a:r>
             <a:r>
-              <a:rPr sz="2200" b="0" i="0">
+              <a:rPr sz="2200" b="0" i="0" dirty="0">
                 <a:solidFill>
                   <a:srgbClr val="334155"/>
                 </a:solidFill>
@@ -7262,7 +7546,7 @@
               </a:spcAft>
             </a:pPr>
             <a:r>
-              <a:rPr sz="2200" b="1" i="0">
+              <a:rPr sz="2200" b="1" i="0" dirty="0">
                 <a:solidFill>
                   <a:srgbClr val="0EA5E9"/>
                 </a:solidFill>
@@ -7271,7 +7555,7 @@
               <a:t>▪  </a:t>
             </a:r>
             <a:r>
-              <a:rPr sz="2200" b="0" i="0">
+              <a:rPr sz="2200" b="0" i="0" dirty="0">
                 <a:solidFill>
                   <a:srgbClr val="334155"/>
                 </a:solidFill>
@@ -7290,7 +7574,7 @@
               </a:spcAft>
             </a:pPr>
             <a:r>
-              <a:rPr sz="2200" b="1" i="0">
+              <a:rPr sz="2200" b="1" i="0" dirty="0">
                 <a:solidFill>
                   <a:srgbClr val="0EA5E9"/>
                 </a:solidFill>
@@ -7299,7 +7583,7 @@
               <a:t>▪  </a:t>
             </a:r>
             <a:r>
-              <a:rPr sz="2200" b="0" i="0">
+              <a:rPr sz="2200" b="0" i="0" dirty="0">
                 <a:solidFill>
                   <a:srgbClr val="334155"/>
                 </a:solidFill>
@@ -7318,7 +7602,7 @@
               </a:spcAft>
             </a:pPr>
             <a:r>
-              <a:rPr sz="2200" b="1" i="0">
+              <a:rPr sz="2200" b="1" i="0" dirty="0">
                 <a:solidFill>
                   <a:srgbClr val="0EA5E9"/>
                 </a:solidFill>
@@ -7327,7 +7611,7 @@
               <a:t>▪  </a:t>
             </a:r>
             <a:r>
-              <a:rPr sz="2200" b="0" i="0">
+              <a:rPr sz="2200" b="0" i="0" dirty="0">
                 <a:solidFill>
                   <a:srgbClr val="334155"/>
                 </a:solidFill>
@@ -7346,7 +7630,7 @@
               </a:spcAft>
             </a:pPr>
             <a:r>
-              <a:rPr sz="2200" b="1" i="0">
+              <a:rPr sz="2200" b="1" i="0" dirty="0">
                 <a:solidFill>
                   <a:srgbClr val="0EA5E9"/>
                 </a:solidFill>
@@ -7355,13 +7639,31 @@
               <a:t>▪  </a:t>
             </a:r>
             <a:r>
-              <a:rPr sz="2200" b="0" i="0">
+              <a:rPr sz="2200" b="0" i="0" dirty="0">
                 <a:solidFill>
                   <a:srgbClr val="334155"/>
                 </a:solidFill>
                 <a:latin typeface="Segoe UI"/>
               </a:rPr>
-              <a:t>6.  Install the course libraries</a:t>
+              <a:t>6.  Install the </a:t>
+            </a:r>
+            <a:r>
+              <a:rPr lang="en-US" sz="2200" b="0" i="0" dirty="0">
+                <a:solidFill>
+                  <a:srgbClr val="334155"/>
+                </a:solidFill>
+                <a:latin typeface="Segoe UI"/>
+              </a:rPr>
+              <a:t>Python </a:t>
+            </a:r>
+            <a:r>
+              <a:rPr sz="2200" b="0" i="0" dirty="0">
+                <a:solidFill>
+                  <a:srgbClr val="334155"/>
+                </a:solidFill>
+                <a:latin typeface="Segoe UI"/>
+              </a:rPr>
+              <a:t>libraries</a:t>
             </a:r>
           </a:p>
         </p:txBody>
@@ -7797,7 +8099,7 @@
         </p:nvSpPr>
         <p:spPr>
           <a:xfrm>
-            <a:off x="0" y="0"/>
+            <a:off x="0" y="6626"/>
             <a:ext cx="12191695" cy="6858000"/>
           </a:xfrm>
           <a:prstGeom prst="rect">
@@ -8195,8 +8497,8 @@
         </p:nvSpPr>
         <p:spPr>
           <a:xfrm>
-            <a:off x="640080" y="4160520"/>
-            <a:ext cx="10972800" cy="4480560"/>
+            <a:off x="708990" y="4160520"/>
+            <a:ext cx="10903889" cy="292388"/>
           </a:xfrm>
           <a:prstGeom prst="rect">
             <a:avLst/>
@@ -8218,7 +8520,7 @@
               </a:spcAft>
             </a:pPr>
             <a:r>
-              <a:rPr sz="1900" b="1" i="0">
+              <a:rPr sz="1900" b="1" i="0" dirty="0">
                 <a:solidFill>
                   <a:srgbClr val="0EA5E9"/>
                 </a:solidFill>
@@ -8227,7 +8529,7 @@
               <a:t>▪  </a:t>
             </a:r>
             <a:r>
-              <a:rPr sz="1900" b="0" i="0">
+              <a:rPr sz="1900" b="0" i="0" dirty="0">
                 <a:solidFill>
                   <a:srgbClr val="334155"/>
                 </a:solidFill>
@@ -9068,7 +9370,7 @@
         <p:spPr>
           <a:xfrm>
             <a:off x="640080" y="3977639"/>
-            <a:ext cx="10972800" cy="4480560"/>
+            <a:ext cx="10972800" cy="682238"/>
           </a:xfrm>
           <a:prstGeom prst="rect">
             <a:avLst/>
@@ -9090,7 +9392,7 @@
               </a:spcAft>
             </a:pPr>
             <a:r>
-              <a:rPr sz="1900" b="1" i="0">
+              <a:rPr sz="1900" b="1" i="0" dirty="0">
                 <a:solidFill>
                   <a:srgbClr val="0EA5E9"/>
                 </a:solidFill>
@@ -9099,7 +9401,7 @@
               <a:t>▪  </a:t>
             </a:r>
             <a:r>
-              <a:rPr sz="1900" b="0" i="0">
+              <a:rPr sz="1900" b="0" i="0" dirty="0">
                 <a:solidFill>
                   <a:srgbClr val="334155"/>
                 </a:solidFill>
@@ -9118,7 +9420,7 @@
               </a:spcAft>
             </a:pPr>
             <a:r>
-              <a:rPr sz="1700" b="0" i="0">
+              <a:rPr sz="1700" b="0" i="0" dirty="0">
                 <a:solidFill>
                   <a:srgbClr val="94A3B8"/>
                 </a:solidFill>
@@ -9127,41 +9429,13 @@
               <a:t>      –  </a:t>
             </a:r>
             <a:r>
-              <a:rPr sz="1700" b="0" i="0">
+              <a:rPr sz="1700" b="0" i="0" dirty="0">
                 <a:solidFill>
                   <a:srgbClr val="334155"/>
                 </a:solidFill>
                 <a:latin typeface="Segoe UI"/>
               </a:rPr>
               <a:t>Prints Python 3.14.x  →  all three installs are correct</a:t>
-            </a:r>
-          </a:p>
-          <a:p>
-            <a:pPr>
-              <a:spcBef>
-                <a:spcPts val="0"/>
-              </a:spcBef>
-              <a:spcAft>
-                <a:spcPts val="1000"/>
-              </a:spcAft>
-            </a:pPr>
-            <a:r>
-              <a:rPr sz="1900" b="1" i="0">
-                <a:solidFill>
-                  <a:srgbClr val="0EA5E9"/>
-                </a:solidFill>
-                <a:latin typeface="Segoe UI"/>
-              </a:rPr>
-              <a:t>▪  </a:t>
-            </a:r>
-            <a:r>
-              <a:rPr sz="1900" b="0" i="0">
-                <a:solidFill>
-                  <a:srgbClr val="334155"/>
-                </a:solidFill>
-                <a:latin typeface="Segoe UI"/>
-              </a:rPr>
-              <a:t>Teacher tip: have everyone read out their python --version</a:t>
             </a:r>
           </a:p>
         </p:txBody>
@@ -9604,37 +9878,105 @@
           <a:bodyPr wrap="square" lIns="182880" tIns="109728" rtlCol="0" anchor="t"/>
           <a:lstStyle/>
           <a:p>
-            <a:pPr algn="ctr"/>
-            <a:r>
-              <a:rPr sz="1400" b="0" i="0">
+            <a:r>
+              <a:rPr sz="1400" b="0" i="0" dirty="0">
                 <a:solidFill>
                   <a:srgbClr val="0F172A"/>
                 </a:solidFill>
                 <a:latin typeface="Consolas"/>
               </a:rPr>
-              <a:t>python -m venv .venv</a:t>
-            </a:r>
-          </a:p>
-          <a:p>
-            <a:r>
-              <a:rPr sz="1400" b="0" i="0">
+              <a:t>python -m </a:t>
+            </a:r>
+            <a:r>
+              <a:rPr sz="1400" b="0" i="0" dirty="0" err="1">
                 <a:solidFill>
                   <a:srgbClr val="0F172A"/>
                 </a:solidFill>
                 <a:latin typeface="Consolas"/>
               </a:rPr>
-              <a:t>.venv\Scripts\Activate.ps1     # Windows (PowerShell)</a:t>
-            </a:r>
-          </a:p>
-          <a:p>
-            <a:r>
-              <a:rPr sz="1400" b="0" i="0">
+              <a:t>venv</a:t>
+            </a:r>
+            <a:r>
+              <a:rPr sz="1400" b="0" i="0" dirty="0">
                 <a:solidFill>
                   <a:srgbClr val="0F172A"/>
                 </a:solidFill>
                 <a:latin typeface="Consolas"/>
               </a:rPr>
-              <a:t>source .venv/bin/activate      # macOS / Linux</a:t>
+              <a:t> .</a:t>
+            </a:r>
+            <a:r>
+              <a:rPr sz="1400" b="0" i="0" dirty="0" err="1">
+                <a:solidFill>
+                  <a:srgbClr val="0F172A"/>
+                </a:solidFill>
+                <a:latin typeface="Consolas"/>
+              </a:rPr>
+              <a:t>venv</a:t>
+            </a:r>
+            <a:endParaRPr sz="1400" b="0" i="0" dirty="0">
+              <a:solidFill>
+                <a:srgbClr val="0F172A"/>
+              </a:solidFill>
+              <a:latin typeface="Consolas"/>
+            </a:endParaRPr>
+          </a:p>
+          <a:p>
+            <a:r>
+              <a:rPr sz="1400" b="0" i="0" dirty="0">
+                <a:solidFill>
+                  <a:srgbClr val="0F172A"/>
+                </a:solidFill>
+                <a:latin typeface="Consolas"/>
+              </a:rPr>
+              <a:t>.</a:t>
+            </a:r>
+            <a:r>
+              <a:rPr sz="1400" b="0" i="0" dirty="0" err="1">
+                <a:solidFill>
+                  <a:srgbClr val="0F172A"/>
+                </a:solidFill>
+                <a:latin typeface="Consolas"/>
+              </a:rPr>
+              <a:t>venv</a:t>
+            </a:r>
+            <a:r>
+              <a:rPr sz="1400" b="0" i="0" dirty="0">
+                <a:solidFill>
+                  <a:srgbClr val="0F172A"/>
+                </a:solidFill>
+                <a:latin typeface="Consolas"/>
+              </a:rPr>
+              <a:t>\Scripts\Activate.ps1     # Windows (PowerShell)</a:t>
+            </a:r>
+          </a:p>
+          <a:p>
+            <a:r>
+              <a:rPr sz="1400" b="0" i="0" dirty="0">
+                <a:solidFill>
+                  <a:srgbClr val="0F172A"/>
+                </a:solidFill>
+                <a:latin typeface="Consolas"/>
+              </a:rPr>
+              <a:t>source .</a:t>
+            </a:r>
+            <a:r>
+              <a:rPr sz="1400" b="0" i="0" dirty="0" err="1">
+                <a:solidFill>
+                  <a:srgbClr val="0F172A"/>
+                </a:solidFill>
+                <a:latin typeface="Consolas"/>
+              </a:rPr>
+              <a:t>venv</a:t>
+            </a:r>
+            <a:r>
+              <a:rPr sz="1400" b="0" i="0" dirty="0">
+                <a:solidFill>
+                  <a:srgbClr val="0F172A"/>
+                </a:solidFill>
+                <a:latin typeface="Consolas"/>
+              </a:rPr>
+              <a:t>/bin/activate      # macOS / Linux</a:t>
             </a:r>
           </a:p>
         </p:txBody>
